--- a/slides/2022-IoT-Hackday-Handout.pptx
+++ b/slides/2022-IoT-Hackday-Handout.pptx
@@ -209,7 +209,7 @@
           <a:p>
             <a:fld id="{BEC7F16E-4C38-1E41-84AF-AA19D4DCBAA8}" type="datetimeFigureOut">
               <a:rPr lang="en-US" smtClean="0"/>
-              <a:t>10/10/22</a:t>
+              <a:t>10/19/22</a:t>
             </a:fld>
             <a:endParaRPr lang="en-US"/>
           </a:p>
@@ -739,7 +739,7 @@
           <a:p>
             <a:fld id="{3CA7CF7C-1FA5-40F9-B14A-8E1D58938A8E}" type="datetimeFigureOut">
               <a:rPr lang="en-US" smtClean="0"/>
-              <a:t>10/10/22</a:t>
+              <a:t>10/19/22</a:t>
             </a:fld>
             <a:endParaRPr lang="en-US"/>
           </a:p>
@@ -902,7 +902,7 @@
           <a:p>
             <a:fld id="{3CA7CF7C-1FA5-40F9-B14A-8E1D58938A8E}" type="datetimeFigureOut">
               <a:rPr lang="en-US" smtClean="0"/>
-              <a:t>10/10/22</a:t>
+              <a:t>10/19/22</a:t>
             </a:fld>
             <a:endParaRPr lang="en-US"/>
           </a:p>
@@ -1075,7 +1075,7 @@
           <a:p>
             <a:fld id="{3CA7CF7C-1FA5-40F9-B14A-8E1D58938A8E}" type="datetimeFigureOut">
               <a:rPr lang="en-US" smtClean="0"/>
-              <a:t>10/10/22</a:t>
+              <a:t>10/19/22</a:t>
             </a:fld>
             <a:endParaRPr lang="en-US"/>
           </a:p>
@@ -1238,7 +1238,7 @@
           <a:p>
             <a:fld id="{3CA7CF7C-1FA5-40F9-B14A-8E1D58938A8E}" type="datetimeFigureOut">
               <a:rPr lang="en-US" smtClean="0"/>
-              <a:t>10/10/22</a:t>
+              <a:t>10/19/22</a:t>
             </a:fld>
             <a:endParaRPr lang="en-US"/>
           </a:p>
@@ -1478,7 +1478,7 @@
           <a:p>
             <a:fld id="{3CA7CF7C-1FA5-40F9-B14A-8E1D58938A8E}" type="datetimeFigureOut">
               <a:rPr lang="en-US" smtClean="0"/>
-              <a:t>10/10/22</a:t>
+              <a:t>10/19/22</a:t>
             </a:fld>
             <a:endParaRPr lang="en-US"/>
           </a:p>
@@ -1758,7 +1758,7 @@
           <a:p>
             <a:fld id="{3CA7CF7C-1FA5-40F9-B14A-8E1D58938A8E}" type="datetimeFigureOut">
               <a:rPr lang="en-US" smtClean="0"/>
-              <a:t>10/10/22</a:t>
+              <a:t>10/19/22</a:t>
             </a:fld>
             <a:endParaRPr lang="en-US"/>
           </a:p>
@@ -2177,7 +2177,7 @@
           <a:p>
             <a:fld id="{3CA7CF7C-1FA5-40F9-B14A-8E1D58938A8E}" type="datetimeFigureOut">
               <a:rPr lang="en-US" smtClean="0"/>
-              <a:t>10/10/22</a:t>
+              <a:t>10/19/22</a:t>
             </a:fld>
             <a:endParaRPr lang="en-US"/>
           </a:p>
@@ -2289,7 +2289,7 @@
           <a:p>
             <a:fld id="{3CA7CF7C-1FA5-40F9-B14A-8E1D58938A8E}" type="datetimeFigureOut">
               <a:rPr lang="en-US" smtClean="0"/>
-              <a:t>10/10/22</a:t>
+              <a:t>10/19/22</a:t>
             </a:fld>
             <a:endParaRPr lang="en-US"/>
           </a:p>
@@ -2379,7 +2379,7 @@
           <a:p>
             <a:fld id="{3CA7CF7C-1FA5-40F9-B14A-8E1D58938A8E}" type="datetimeFigureOut">
               <a:rPr lang="en-US" smtClean="0"/>
-              <a:t>10/10/22</a:t>
+              <a:t>10/19/22</a:t>
             </a:fld>
             <a:endParaRPr lang="en-US"/>
           </a:p>
@@ -2649,7 +2649,7 @@
           <a:p>
             <a:fld id="{3CA7CF7C-1FA5-40F9-B14A-8E1D58938A8E}" type="datetimeFigureOut">
               <a:rPr lang="en-US" smtClean="0"/>
-              <a:t>10/10/22</a:t>
+              <a:t>10/19/22</a:t>
             </a:fld>
             <a:endParaRPr lang="en-US"/>
           </a:p>
@@ -2896,7 +2896,7 @@
           <a:p>
             <a:fld id="{3CA7CF7C-1FA5-40F9-B14A-8E1D58938A8E}" type="datetimeFigureOut">
               <a:rPr lang="en-US" smtClean="0"/>
-              <a:t>10/10/22</a:t>
+              <a:t>10/19/22</a:t>
             </a:fld>
             <a:endParaRPr lang="en-US"/>
           </a:p>
@@ -3102,7 +3102,7 @@
           <a:p>
             <a:fld id="{3CA7CF7C-1FA5-40F9-B14A-8E1D58938A8E}" type="datetimeFigureOut">
               <a:rPr lang="en-US" smtClean="0"/>
-              <a:t>10/10/22</a:t>
+              <a:t>10/19/22</a:t>
             </a:fld>
             <a:endParaRPr lang="en-US"/>
           </a:p>
@@ -3474,10 +3474,10 @@
       </p:grpSpPr>
       <p:pic>
         <p:nvPicPr>
-          <p:cNvPr id="43" name="Picture 42">
+          <p:cNvPr id="16" name="Picture 15">
             <a:extLst>
               <a:ext uri="{FF2B5EF4-FFF2-40B4-BE49-F238E27FC236}">
-                <a16:creationId xmlns:a16="http://schemas.microsoft.com/office/drawing/2014/main" id="{07E58FE1-B72D-F258-17DE-6A6E0E78355B}"/>
+                <a16:creationId xmlns:a16="http://schemas.microsoft.com/office/drawing/2014/main" id="{10BFCDA8-A34B-C9D0-6A3C-684C27385432}"/>
               </a:ext>
             </a:extLst>
           </p:cNvPr>
@@ -3494,7 +3494,42 @@
         </p:blipFill>
         <p:spPr>
           <a:xfrm>
-            <a:off x="1524000" y="632223"/>
+            <a:off x="393519" y="6175330"/>
+            <a:ext cx="4039639" cy="2700657"/>
+          </a:xfrm>
+          <a:prstGeom prst="rect">
+            <a:avLst/>
+          </a:prstGeom>
+          <a:ln>
+            <a:solidFill>
+              <a:schemeClr val="tx1"/>
+            </a:solidFill>
+          </a:ln>
+        </p:spPr>
+      </p:pic>
+      <p:pic>
+        <p:nvPicPr>
+          <p:cNvPr id="43" name="Picture 42">
+            <a:extLst>
+              <a:ext uri="{FF2B5EF4-FFF2-40B4-BE49-F238E27FC236}">
+                <a16:creationId xmlns:a16="http://schemas.microsoft.com/office/drawing/2014/main" id="{07E58FE1-B72D-F258-17DE-6A6E0E78355B}"/>
+              </a:ext>
+            </a:extLst>
+          </p:cNvPr>
+          <p:cNvPicPr>
+            <a:picLocks noChangeAspect="1"/>
+          </p:cNvPicPr>
+          <p:nvPr/>
+        </p:nvPicPr>
+        <p:blipFill>
+          <a:blip r:embed="rId4"/>
+          <a:stretch>
+            <a:fillRect/>
+          </a:stretch>
+        </p:blipFill>
+        <p:spPr>
+          <a:xfrm>
+            <a:off x="1523999" y="543459"/>
             <a:ext cx="4857750" cy="1312602"/>
           </a:xfrm>
           <a:prstGeom prst="rect">
@@ -3527,7 +3562,11 @@
             <a:pPr marL="742950" indent="-742950"/>
             <a:r>
               <a:rPr lang="en-US" sz="2400" b="1" dirty="0"/>
-              <a:t>2022 STEM Day at The Thinking Spot</a:t>
+              <a:t>2022 </a:t>
+            </a:r>
+            <a:r>
+              <a:rPr lang="en-US" sz="2400" b="1"/>
+              <a:t>IoT Hackday</a:t>
             </a:r>
             <a:endParaRPr lang="en-US" sz="2400" dirty="0"/>
           </a:p>
@@ -3570,7 +3609,7 @@
               <p:nvPr/>
             </p:nvPicPr>
             <p:blipFill>
-              <a:blip r:embed="rId4" cstate="print"/>
+              <a:blip r:embed="rId5" cstate="print"/>
               <a:srcRect/>
               <a:stretch>
                 <a:fillRect/>
@@ -3782,7 +3821,7 @@
         </p:nvGrpSpPr>
         <p:grpSpPr>
           <a:xfrm>
-            <a:off x="3120955" y="1252069"/>
+            <a:off x="2972385" y="970972"/>
             <a:ext cx="2811464" cy="1179967"/>
             <a:chOff x="488250" y="1084408"/>
             <a:chExt cx="2811464" cy="1179967"/>
@@ -3823,7 +3862,7 @@
               </a:pPr>
               <a:r>
                 <a:rPr lang="en-US" sz="1200" dirty="0"/>
-                <a:t>Raspberry Pi Pico - $4</a:t>
+                <a:t>Raspberry Pi Pico “W” - $6</a:t>
               </a:r>
             </a:p>
             <a:p>
@@ -3863,7 +3902,7 @@
               </a:pPr>
               <a:r>
                 <a:rPr lang="en-US" sz="1200" dirty="0"/>
-                <a:t>LED strip  (SW2812B) - $2.5</a:t>
+                <a:t>LED strip  (SW2812B) – $4 to $7.5</a:t>
               </a:r>
             </a:p>
           </p:txBody>
@@ -3926,7 +3965,7 @@
         </p:nvSpPr>
         <p:spPr>
           <a:xfrm>
-            <a:off x="333798" y="2642027"/>
+            <a:off x="313636" y="2244911"/>
             <a:ext cx="4814063" cy="461665"/>
           </a:xfrm>
           <a:prstGeom prst="rect">
@@ -3974,7 +4013,7 @@
         </p:nvSpPr>
         <p:spPr>
           <a:xfrm>
-            <a:off x="398276" y="2451242"/>
+            <a:off x="304800" y="2055422"/>
             <a:ext cx="2339936" cy="225474"/>
           </a:xfrm>
           <a:prstGeom prst="roundRect">
@@ -4021,7 +4060,7 @@
         </p:nvSpPr>
         <p:spPr>
           <a:xfrm>
-            <a:off x="321346" y="3451460"/>
+            <a:off x="304659" y="3009301"/>
             <a:ext cx="3384526" cy="646331"/>
           </a:xfrm>
           <a:prstGeom prst="rect">
@@ -4053,7 +4092,7 @@
             <a:r>
               <a:rPr lang="en-US" sz="1200" dirty="0">
                 <a:latin typeface="Arial Narrow" pitchFamily="34" charset="0"/>
-                <a:hlinkClick r:id="rId5"/>
+                <a:hlinkClick r:id="rId6"/>
               </a:rPr>
               <a:t>https://thonny.org</a:t>
             </a:r>
@@ -4087,7 +4126,7 @@
         </p:nvSpPr>
         <p:spPr>
           <a:xfrm>
-            <a:off x="398276" y="3296938"/>
+            <a:off x="313636" y="2827657"/>
             <a:ext cx="2531541" cy="202473"/>
           </a:xfrm>
           <a:prstGeom prst="roundRect">
@@ -4135,7 +4174,7 @@
         </p:nvGrpSpPr>
         <p:grpSpPr>
           <a:xfrm>
-            <a:off x="240679" y="5451154"/>
+            <a:off x="324498" y="4800594"/>
             <a:ext cx="2669133" cy="567105"/>
             <a:chOff x="373018" y="5090266"/>
             <a:chExt cx="2237305" cy="567105"/>
@@ -4176,7 +4215,7 @@
                 <a:rPr lang="en-US" sz="1200" dirty="0">
                   <a:latin typeface="Arial Narrow" pitchFamily="34" charset="0"/>
                 </a:rPr>
-                <a:t>Connect the USB from your PC to the Pico.</a:t>
+                <a:t>Connect the USB from your PC to the Pico</a:t>
               </a:r>
             </a:p>
             <a:p>
@@ -4184,7 +4223,7 @@
                 <a:rPr lang="en-US" sz="1200" dirty="0">
                   <a:latin typeface="Arial Narrow" pitchFamily="34" charset="0"/>
                 </a:rPr>
-                <a:t>Test the command line.</a:t>
+                <a:t>Press Stop/Reset and check prompt</a:t>
               </a:r>
             </a:p>
           </p:txBody>
@@ -4245,8 +4284,8 @@
         </p:nvSpPr>
         <p:spPr>
           <a:xfrm>
-            <a:off x="240679" y="6334162"/>
-            <a:ext cx="4235448" cy="503092"/>
+            <a:off x="313636" y="5575669"/>
+            <a:ext cx="3877364" cy="290868"/>
           </a:xfrm>
           <a:prstGeom prst="rect">
             <a:avLst/>
@@ -4268,9 +4307,18 @@
           </a:bodyPr>
           <a:lstStyle/>
           <a:p>
-            <a:endParaRPr lang="en-US" sz="1200" dirty="0">
-              <a:latin typeface="Arial Narrow" pitchFamily="34" charset="0"/>
-            </a:endParaRPr>
+            <a:r>
+              <a:rPr lang="en-US" sz="1400" dirty="0"/>
+              <a:t>http://</a:t>
+            </a:r>
+            <a:r>
+              <a:rPr lang="en-US" sz="1400" dirty="0" err="1"/>
+              <a:t>dmccreary.github.io</a:t>
+            </a:r>
+            <a:r>
+              <a:rPr lang="en-US" sz="1400" dirty="0"/>
+              <a:t>/moving-rainbow</a:t>
+            </a:r>
           </a:p>
         </p:txBody>
       </p:sp>
@@ -4282,7 +4330,7 @@
         </p:nvSpPr>
         <p:spPr>
           <a:xfrm>
-            <a:off x="296240" y="6245996"/>
+            <a:off x="306113" y="5477267"/>
             <a:ext cx="3755787" cy="183093"/>
           </a:xfrm>
           <a:prstGeom prst="roundRect">
@@ -4316,56 +4364,8 @@
           <a:p>
             <a:r>
               <a:rPr lang="en-US" sz="1000" dirty="0"/>
-              <a:t>Step 4: Run the Blink program</a:t>
-            </a:r>
-          </a:p>
-        </p:txBody>
-      </p:sp>
-      <p:sp>
-        <p:nvSpPr>
-          <p:cNvPr id="15" name="Rectangle 14"/>
-          <p:cNvSpPr/>
-          <p:nvPr/>
-        </p:nvSpPr>
-        <p:spPr>
-          <a:xfrm>
-            <a:off x="4212247" y="6890785"/>
-            <a:ext cx="798515" cy="609600"/>
-          </a:xfrm>
-          <a:prstGeom prst="rect">
-            <a:avLst/>
-          </a:prstGeom>
-          <a:solidFill>
-            <a:schemeClr val="bg1">
-              <a:lumMod val="95000"/>
-            </a:schemeClr>
-          </a:solidFill>
-          <a:ln>
-            <a:noFill/>
-          </a:ln>
-        </p:spPr>
-        <p:style>
-          <a:lnRef idx="2">
-            <a:schemeClr val="accent1">
-              <a:shade val="50000"/>
-            </a:schemeClr>
-          </a:lnRef>
-          <a:fillRef idx="1">
-            <a:schemeClr val="accent1"/>
-          </a:fillRef>
-          <a:effectRef idx="0">
-            <a:schemeClr val="accent1"/>
-          </a:effectRef>
-          <a:fontRef idx="minor">
-            <a:schemeClr val="lt1"/>
-          </a:fontRef>
-        </p:style>
-        <p:txBody>
-          <a:bodyPr rtlCol="0" anchor="ctr"/>
-          <a:lstStyle/>
-          <a:p>
-            <a:pPr algn="ctr"/>
-            <a:endParaRPr lang="en-US"/>
+              <a:t>Step 4: Find the Blink program</a:t>
+            </a:r>
           </a:p>
         </p:txBody>
       </p:sp>
@@ -4384,14 +4384,14 @@
           <p:nvPr/>
         </p:nvPicPr>
         <p:blipFill>
-          <a:blip r:embed="rId6"/>
+          <a:blip r:embed="rId7"/>
           <a:stretch>
             <a:fillRect/>
           </a:stretch>
         </p:blipFill>
         <p:spPr>
           <a:xfrm>
-            <a:off x="3808719" y="3381416"/>
+            <a:off x="3806735" y="2983415"/>
             <a:ext cx="2043430" cy="743066"/>
           </a:xfrm>
           <a:prstGeom prst="rect">
@@ -4414,36 +4414,6 @@
           <p:nvPr/>
         </p:nvPicPr>
         <p:blipFill>
-          <a:blip r:embed="rId7"/>
-          <a:stretch>
-            <a:fillRect/>
-          </a:stretch>
-        </p:blipFill>
-        <p:spPr>
-          <a:xfrm>
-            <a:off x="1269780" y="4216021"/>
-            <a:ext cx="5105400" cy="1100739"/>
-          </a:xfrm>
-          <a:prstGeom prst="rect">
-            <a:avLst/>
-          </a:prstGeom>
-        </p:spPr>
-      </p:pic>
-      <p:pic>
-        <p:nvPicPr>
-          <p:cNvPr id="34" name="Picture 33">
-            <a:extLst>
-              <a:ext uri="{FF2B5EF4-FFF2-40B4-BE49-F238E27FC236}">
-                <a16:creationId xmlns:a16="http://schemas.microsoft.com/office/drawing/2014/main" id="{176AAE15-AA95-E36F-73F1-0A1DA340A90E}"/>
-              </a:ext>
-            </a:extLst>
-          </p:cNvPr>
-          <p:cNvPicPr>
-            <a:picLocks noChangeAspect="1"/>
-          </p:cNvPicPr>
-          <p:nvPr/>
-        </p:nvPicPr>
-        <p:blipFill>
           <a:blip r:embed="rId8"/>
           <a:stretch>
             <a:fillRect/>
@@ -4451,20 +4421,73 @@
         </p:blipFill>
         <p:spPr>
           <a:xfrm>
-            <a:off x="3239426" y="5474371"/>
-            <a:ext cx="3108603" cy="596661"/>
+            <a:off x="876300" y="3711529"/>
+            <a:ext cx="4538565" cy="978528"/>
           </a:xfrm>
           <a:prstGeom prst="rect">
             <a:avLst/>
           </a:prstGeom>
         </p:spPr>
       </p:pic>
+      <p:sp>
+        <p:nvSpPr>
+          <p:cNvPr id="6" name="Rounded Rectangle 5">
+            <a:extLst>
+              <a:ext uri="{FF2B5EF4-FFF2-40B4-BE49-F238E27FC236}">
+                <a16:creationId xmlns:a16="http://schemas.microsoft.com/office/drawing/2014/main" id="{32DDFBEC-0C5F-49DD-8D27-F54E90B4D767}"/>
+              </a:ext>
+            </a:extLst>
+          </p:cNvPr>
+          <p:cNvSpPr/>
+          <p:nvPr/>
+        </p:nvSpPr>
+        <p:spPr>
+          <a:xfrm>
+            <a:off x="334583" y="6023453"/>
+            <a:ext cx="3755787" cy="183093"/>
+          </a:xfrm>
+          <a:prstGeom prst="roundRect">
+            <a:avLst/>
+          </a:prstGeom>
+          <a:ln w="19050">
+            <a:solidFill>
+              <a:schemeClr val="tx1"/>
+            </a:solidFill>
+          </a:ln>
+        </p:spPr>
+        <p:style>
+          <a:lnRef idx="2">
+            <a:schemeClr val="accent1">
+              <a:shade val="50000"/>
+            </a:schemeClr>
+          </a:lnRef>
+          <a:fillRef idx="1">
+            <a:schemeClr val="accent1"/>
+          </a:fillRef>
+          <a:effectRef idx="0">
+            <a:schemeClr val="accent1"/>
+          </a:effectRef>
+          <a:fontRef idx="minor">
+            <a:schemeClr val="lt1"/>
+          </a:fontRef>
+        </p:style>
+        <p:txBody>
+          <a:bodyPr rtlCol="0" anchor="ctr"/>
+          <a:lstStyle/>
+          <a:p>
+            <a:r>
+              <a:rPr lang="en-US" sz="1000" dirty="0"/>
+              <a:t>Step 4:  Run the Blink Program</a:t>
+            </a:r>
+          </a:p>
+        </p:txBody>
+      </p:sp>
       <p:pic>
         <p:nvPicPr>
-          <p:cNvPr id="39" name="Picture 38">
+          <p:cNvPr id="17" name="Picture 16">
             <a:extLst>
               <a:ext uri="{FF2B5EF4-FFF2-40B4-BE49-F238E27FC236}">
-                <a16:creationId xmlns:a16="http://schemas.microsoft.com/office/drawing/2014/main" id="{42B03F6D-CFDC-D709-47D5-BD9EE8C47318}"/>
+                <a16:creationId xmlns:a16="http://schemas.microsoft.com/office/drawing/2014/main" id="{EC0C8432-51DA-D6F3-C68B-F342DF9FC396}"/>
               </a:ext>
             </a:extLst>
           </p:cNvPr>
@@ -4480,9 +4503,152 @@
           </a:stretch>
         </p:blipFill>
         <p:spPr>
+          <a:xfrm rot="5400000">
+            <a:off x="4140982" y="6583430"/>
+            <a:ext cx="2731599" cy="1915397"/>
+          </a:xfrm>
+          <a:prstGeom prst="rect">
+            <a:avLst/>
+          </a:prstGeom>
+        </p:spPr>
+      </p:pic>
+      <p:sp>
+        <p:nvSpPr>
+          <p:cNvPr id="18" name="TextBox 17">
+            <a:extLst>
+              <a:ext uri="{FF2B5EF4-FFF2-40B4-BE49-F238E27FC236}">
+                <a16:creationId xmlns:a16="http://schemas.microsoft.com/office/drawing/2014/main" id="{5996F69C-51AC-670C-1E79-F66321A79AF5}"/>
+              </a:ext>
+            </a:extLst>
+          </p:cNvPr>
+          <p:cNvSpPr txBox="1"/>
+          <p:nvPr/>
+        </p:nvSpPr>
+        <p:spPr>
           <a:xfrm>
-            <a:off x="691365" y="6752109"/>
-            <a:ext cx="4983497" cy="2221351"/>
+            <a:off x="5278582" y="8038876"/>
+            <a:ext cx="537327" cy="307777"/>
+          </a:xfrm>
+          <a:prstGeom prst="rect">
+            <a:avLst/>
+          </a:prstGeom>
+          <a:noFill/>
+        </p:spPr>
+        <p:txBody>
+          <a:bodyPr wrap="none" rtlCol="0">
+            <a:spAutoFit/>
+          </a:bodyPr>
+          <a:lstStyle/>
+          <a:p>
+            <a:r>
+              <a:rPr lang="en-US" sz="1400" dirty="0">
+                <a:solidFill>
+                  <a:schemeClr val="bg1"/>
+                </a:solidFill>
+              </a:rPr>
+              <a:t>FWD</a:t>
+            </a:r>
+          </a:p>
+        </p:txBody>
+      </p:sp>
+      <p:sp>
+        <p:nvSpPr>
+          <p:cNvPr id="21" name="TextBox 20">
+            <a:extLst>
+              <a:ext uri="{FF2B5EF4-FFF2-40B4-BE49-F238E27FC236}">
+                <a16:creationId xmlns:a16="http://schemas.microsoft.com/office/drawing/2014/main" id="{E6EE96F6-09FF-92BF-2154-0BE8127764B4}"/>
+              </a:ext>
+            </a:extLst>
+          </p:cNvPr>
+          <p:cNvSpPr txBox="1"/>
+          <p:nvPr/>
+        </p:nvSpPr>
+        <p:spPr>
+          <a:xfrm>
+            <a:off x="5310643" y="8568210"/>
+            <a:ext cx="473206" cy="307777"/>
+          </a:xfrm>
+          <a:prstGeom prst="rect">
+            <a:avLst/>
+          </a:prstGeom>
+          <a:noFill/>
+        </p:spPr>
+        <p:txBody>
+          <a:bodyPr wrap="none" rtlCol="0">
+            <a:spAutoFit/>
+          </a:bodyPr>
+          <a:lstStyle/>
+          <a:p>
+            <a:r>
+              <a:rPr lang="en-US" sz="1400" dirty="0">
+                <a:solidFill>
+                  <a:schemeClr val="bg1"/>
+                </a:solidFill>
+              </a:rPr>
+              <a:t>REV</a:t>
+            </a:r>
+          </a:p>
+        </p:txBody>
+      </p:sp>
+      <p:sp>
+        <p:nvSpPr>
+          <p:cNvPr id="22" name="TextBox 21">
+            <a:extLst>
+              <a:ext uri="{FF2B5EF4-FFF2-40B4-BE49-F238E27FC236}">
+                <a16:creationId xmlns:a16="http://schemas.microsoft.com/office/drawing/2014/main" id="{927CD8D8-AE29-0A86-73B4-5E1A142F7463}"/>
+              </a:ext>
+            </a:extLst>
+          </p:cNvPr>
+          <p:cNvSpPr txBox="1"/>
+          <p:nvPr/>
+        </p:nvSpPr>
+        <p:spPr>
+          <a:xfrm>
+            <a:off x="4790431" y="5836267"/>
+            <a:ext cx="1522468" cy="369332"/>
+          </a:xfrm>
+          <a:prstGeom prst="rect">
+            <a:avLst/>
+          </a:prstGeom>
+          <a:noFill/>
+        </p:spPr>
+        <p:txBody>
+          <a:bodyPr wrap="none" rtlCol="0">
+            <a:spAutoFit/>
+          </a:bodyPr>
+          <a:lstStyle/>
+          <a:p>
+            <a:r>
+              <a:rPr lang="en-US" dirty="0"/>
+              <a:t>Mode Buttons</a:t>
+            </a:r>
+          </a:p>
+        </p:txBody>
+      </p:sp>
+      <p:pic>
+        <p:nvPicPr>
+          <p:cNvPr id="25" name="Picture 24">
+            <a:extLst>
+              <a:ext uri="{FF2B5EF4-FFF2-40B4-BE49-F238E27FC236}">
+                <a16:creationId xmlns:a16="http://schemas.microsoft.com/office/drawing/2014/main" id="{7108B576-2C49-F638-5ED0-907199C5D535}"/>
+              </a:ext>
+            </a:extLst>
+          </p:cNvPr>
+          <p:cNvPicPr>
+            <a:picLocks noChangeAspect="1"/>
+          </p:cNvPicPr>
+          <p:nvPr/>
+        </p:nvPicPr>
+        <p:blipFill>
+          <a:blip r:embed="rId10"/>
+          <a:stretch>
+            <a:fillRect/>
+          </a:stretch>
+        </p:blipFill>
+        <p:spPr>
+          <a:xfrm>
+            <a:off x="3056837" y="4900540"/>
+            <a:ext cx="3648764" cy="453571"/>
           </a:xfrm>
           <a:prstGeom prst="rect">
             <a:avLst/>
@@ -4494,49 +4660,6 @@
           </a:ln>
         </p:spPr>
       </p:pic>
-      <p:sp>
-        <p:nvSpPr>
-          <p:cNvPr id="47" name="TextBox 46">
-            <a:extLst>
-              <a:ext uri="{FF2B5EF4-FFF2-40B4-BE49-F238E27FC236}">
-                <a16:creationId xmlns:a16="http://schemas.microsoft.com/office/drawing/2014/main" id="{07979F7A-C384-C8DB-5733-2DFB58BCB3F1}"/>
-              </a:ext>
-            </a:extLst>
-          </p:cNvPr>
-          <p:cNvSpPr txBox="1"/>
-          <p:nvPr/>
-        </p:nvSpPr>
-        <p:spPr>
-          <a:xfrm>
-            <a:off x="381000" y="6429089"/>
-            <a:ext cx="3831247" cy="338554"/>
-          </a:xfrm>
-          <a:prstGeom prst="rect">
-            <a:avLst/>
-          </a:prstGeom>
-          <a:noFill/>
-        </p:spPr>
-        <p:txBody>
-          <a:bodyPr wrap="square" rtlCol="0">
-            <a:spAutoFit/>
-          </a:bodyPr>
-          <a:lstStyle/>
-          <a:p>
-            <a:r>
-              <a:rPr lang="en-US" sz="1600" dirty="0"/>
-              <a:t>http://</a:t>
-            </a:r>
-            <a:r>
-              <a:rPr lang="en-US" sz="1600" dirty="0" err="1"/>
-              <a:t>dmccreary.github.io</a:t>
-            </a:r>
-            <a:r>
-              <a:rPr lang="en-US" sz="1600" dirty="0"/>
-              <a:t>/moving-rainbow</a:t>
-            </a:r>
-          </a:p>
-        </p:txBody>
-      </p:sp>
     </p:spTree>
   </p:cSld>
   <p:clrMapOvr>
@@ -4562,6 +4685,41 @@
           <a:chExt cx="0" cy="0"/>
         </a:xfrm>
       </p:grpSpPr>
+      <p:pic>
+        <p:nvPicPr>
+          <p:cNvPr id="3" name="Picture 2">
+            <a:extLst>
+              <a:ext uri="{FF2B5EF4-FFF2-40B4-BE49-F238E27FC236}">
+                <a16:creationId xmlns:a16="http://schemas.microsoft.com/office/drawing/2014/main" id="{C4653C8F-8418-C605-0DC2-327DA919E904}"/>
+              </a:ext>
+            </a:extLst>
+          </p:cNvPr>
+          <p:cNvPicPr>
+            <a:picLocks noChangeAspect="1"/>
+          </p:cNvPicPr>
+          <p:nvPr/>
+        </p:nvPicPr>
+        <p:blipFill>
+          <a:blip r:embed="rId2"/>
+          <a:stretch>
+            <a:fillRect/>
+          </a:stretch>
+        </p:blipFill>
+        <p:spPr>
+          <a:xfrm>
+            <a:off x="177516" y="2028065"/>
+            <a:ext cx="4589114" cy="1934336"/>
+          </a:xfrm>
+          <a:prstGeom prst="rect">
+            <a:avLst/>
+          </a:prstGeom>
+          <a:ln>
+            <a:solidFill>
+              <a:schemeClr val="tx1"/>
+            </a:solidFill>
+          </a:ln>
+        </p:spPr>
+      </p:pic>
       <p:sp>
         <p:nvSpPr>
           <p:cNvPr id="2" name="Title 1"/>
@@ -4590,917 +4748,488 @@
                 <a:ea typeface="Arial Narrow" charset="0"/>
                 <a:cs typeface="Arial Narrow" charset="0"/>
               </a:rPr>
-              <a:t>MicroPython </a:t>
-            </a:r>
-            <a:r>
-              <a:rPr lang="en-US" sz="2400" b="1" dirty="0" err="1">
-                <a:latin typeface="Arial Narrow" charset="0"/>
-                <a:ea typeface="Arial Narrow" charset="0"/>
-                <a:cs typeface="Arial Narrow" charset="0"/>
+              <a:t>MicroPython NeoPixel Code Examples</a:t>
+            </a:r>
+          </a:p>
+        </p:txBody>
+      </p:sp>
+      <p:sp>
+        <p:nvSpPr>
+          <p:cNvPr id="4" name="TextBox 3"/>
+          <p:cNvSpPr txBox="1"/>
+          <p:nvPr/>
+        </p:nvSpPr>
+        <p:spPr>
+          <a:xfrm>
+            <a:off x="152400" y="605374"/>
+            <a:ext cx="4572000" cy="1138773"/>
+          </a:xfrm>
+          <a:prstGeom prst="rect">
+            <a:avLst/>
+          </a:prstGeom>
+          <a:solidFill>
+            <a:schemeClr val="bg1">
+              <a:lumMod val="95000"/>
+            </a:schemeClr>
+          </a:solidFill>
+          <a:ln>
+            <a:solidFill>
+              <a:schemeClr val="tx1"/>
+            </a:solidFill>
+          </a:ln>
+        </p:spPr>
+        <p:txBody>
+          <a:bodyPr wrap="square" rtlCol="0">
+            <a:spAutoFit/>
+          </a:bodyPr>
+          <a:lstStyle/>
+          <a:p>
+            <a:endParaRPr lang="en-US" sz="800" dirty="0">
+              <a:latin typeface="Arial Narrow" pitchFamily="34" charset="0"/>
+            </a:endParaRPr>
+          </a:p>
+          <a:p>
+            <a:r>
+              <a:rPr lang="en-US" sz="1200" b="0" i="0" dirty="0">
+                <a:solidFill>
+                  <a:schemeClr val="tx2"/>
+                </a:solidFill>
+                <a:effectLst/>
+                <a:latin typeface="Roboto Mono"/>
+              </a:rPr>
+              <a:t>from</a:t>
+            </a:r>
+            <a:r>
+              <a:rPr lang="en-US" sz="1200" b="0" i="0" dirty="0">
+                <a:solidFill>
+                  <a:srgbClr val="36464E"/>
+                </a:solidFill>
+                <a:effectLst/>
+                <a:latin typeface="Roboto Mono"/>
+              </a:rPr>
+              <a:t> </a:t>
+            </a:r>
+            <a:r>
+              <a:rPr lang="en-US" sz="1200" b="0" i="0" dirty="0">
+                <a:solidFill>
+                  <a:schemeClr val="accent4"/>
+                </a:solidFill>
+                <a:effectLst/>
+                <a:latin typeface="Roboto Mono"/>
+              </a:rPr>
+              <a:t>neopixel</a:t>
+            </a:r>
+            <a:r>
+              <a:rPr lang="en-US" sz="1200" b="0" i="0" dirty="0">
+                <a:solidFill>
+                  <a:srgbClr val="36464E"/>
+                </a:solidFill>
+                <a:effectLst/>
+                <a:latin typeface="Roboto Mono"/>
+              </a:rPr>
+              <a:t> </a:t>
+            </a:r>
+            <a:r>
+              <a:rPr lang="en-US" sz="1200" dirty="0">
+                <a:solidFill>
+                  <a:schemeClr val="tx2"/>
+                </a:solidFill>
+                <a:latin typeface="Roboto Mono"/>
+              </a:rPr>
+              <a:t>import</a:t>
+            </a:r>
+            <a:r>
+              <a:rPr lang="en-US" sz="1200" b="0" i="0" dirty="0">
+                <a:solidFill>
+                  <a:srgbClr val="36464E"/>
+                </a:solidFill>
+                <a:effectLst/>
+                <a:latin typeface="Roboto Mono"/>
+              </a:rPr>
+              <a:t> </a:t>
+            </a:r>
+            <a:r>
+              <a:rPr lang="en-US" sz="1200" b="0" i="0" dirty="0">
+                <a:solidFill>
+                  <a:schemeClr val="accent4"/>
+                </a:solidFill>
+                <a:effectLst/>
+                <a:latin typeface="Roboto Mono"/>
               </a:rPr>
               <a:t>NeoPixel</a:t>
             </a:r>
             <a:r>
-              <a:rPr lang="en-US" sz="2400" b="1" dirty="0">
-                <a:latin typeface="Arial Narrow" charset="0"/>
-                <a:ea typeface="Arial Narrow" charset="0"/>
-                <a:cs typeface="Arial Narrow" charset="0"/>
-              </a:rPr>
-              <a:t> Code Examples</a:t>
-            </a:r>
-          </a:p>
-        </p:txBody>
-      </p:sp>
-      <p:grpSp>
-        <p:nvGrpSpPr>
-          <p:cNvPr id="32" name="Group 31"/>
-          <p:cNvGrpSpPr/>
+              <a:rPr lang="en-US" sz="1200" b="0" i="0" dirty="0">
+                <a:solidFill>
+                  <a:srgbClr val="36464E"/>
+                </a:solidFill>
+                <a:effectLst/>
+                <a:latin typeface="Roboto Mono"/>
+              </a:rPr>
+              <a:t> </a:t>
+            </a:r>
+          </a:p>
+          <a:p>
+            <a:r>
+              <a:rPr lang="en-US" sz="1200" dirty="0">
+                <a:solidFill>
+                  <a:schemeClr val="tx2"/>
+                </a:solidFill>
+                <a:latin typeface="Roboto Mono"/>
+              </a:rPr>
+              <a:t>from</a:t>
+            </a:r>
+            <a:r>
+              <a:rPr lang="en-US" sz="1200" b="0" i="0" dirty="0">
+                <a:solidFill>
+                  <a:srgbClr val="36464E"/>
+                </a:solidFill>
+                <a:effectLst/>
+                <a:latin typeface="Roboto Mono"/>
+              </a:rPr>
+              <a:t> </a:t>
+            </a:r>
+            <a:r>
+              <a:rPr lang="en-US" sz="1200" b="0" i="0" dirty="0">
+                <a:solidFill>
+                  <a:schemeClr val="accent4"/>
+                </a:solidFill>
+                <a:effectLst/>
+                <a:latin typeface="Roboto Mono"/>
+              </a:rPr>
+              <a:t>utime</a:t>
+            </a:r>
+            <a:r>
+              <a:rPr lang="en-US" sz="1200" dirty="0">
+                <a:solidFill>
+                  <a:schemeClr val="tx2"/>
+                </a:solidFill>
+                <a:latin typeface="Roboto Mono"/>
+              </a:rPr>
+              <a:t> import </a:t>
+            </a:r>
+            <a:r>
+              <a:rPr lang="en-US" sz="1200" b="0" i="0" dirty="0">
+                <a:solidFill>
+                  <a:schemeClr val="accent4"/>
+                </a:solidFill>
+                <a:effectLst/>
+                <a:latin typeface="Roboto Mono"/>
+              </a:rPr>
+              <a:t>sleep</a:t>
+            </a:r>
+            <a:r>
+              <a:rPr lang="en-US" sz="1200" b="0" i="0" dirty="0">
+                <a:solidFill>
+                  <a:srgbClr val="36464E"/>
+                </a:solidFill>
+                <a:effectLst/>
+                <a:latin typeface="Roboto Mono"/>
+              </a:rPr>
+              <a:t> </a:t>
+            </a:r>
+          </a:p>
+          <a:p>
+            <a:r>
+              <a:rPr lang="en-US" sz="1200" b="0" i="0" dirty="0">
+                <a:solidFill>
+                  <a:srgbClr val="36464E"/>
+                </a:solidFill>
+                <a:effectLst/>
+                <a:latin typeface="Roboto Mono"/>
+              </a:rPr>
+              <a:t>NEOPIXEL_PIN </a:t>
+            </a:r>
+            <a:r>
+              <a:rPr lang="en-US" sz="1200" b="0" i="0" dirty="0">
+                <a:effectLst/>
+                <a:latin typeface="Roboto Mono"/>
+              </a:rPr>
+              <a:t>=</a:t>
+            </a:r>
+            <a:r>
+              <a:rPr lang="en-US" sz="1200" b="0" i="0" dirty="0">
+                <a:solidFill>
+                  <a:srgbClr val="36464E"/>
+                </a:solidFill>
+                <a:effectLst/>
+                <a:latin typeface="Roboto Mono"/>
+              </a:rPr>
+              <a:t> </a:t>
+            </a:r>
+            <a:r>
+              <a:rPr lang="en-US" sz="1200" b="0" i="0" dirty="0">
+                <a:solidFill>
+                  <a:srgbClr val="C00000"/>
+                </a:solidFill>
+                <a:effectLst/>
+                <a:latin typeface="Roboto Mono"/>
+              </a:rPr>
+              <a:t>0</a:t>
+            </a:r>
+            <a:r>
+              <a:rPr lang="en-US" sz="1200" b="0" i="0" dirty="0">
+                <a:solidFill>
+                  <a:srgbClr val="36464E"/>
+                </a:solidFill>
+                <a:effectLst/>
+                <a:latin typeface="Roboto Mono"/>
+              </a:rPr>
+              <a:t> </a:t>
+            </a:r>
+          </a:p>
+          <a:p>
+            <a:r>
+              <a:rPr lang="en-US" sz="1200" b="0" i="0" dirty="0">
+                <a:solidFill>
+                  <a:srgbClr val="36464E"/>
+                </a:solidFill>
+                <a:effectLst/>
+                <a:latin typeface="Roboto Mono"/>
+              </a:rPr>
+              <a:t>NUMB_PIXELS </a:t>
+            </a:r>
+            <a:r>
+              <a:rPr lang="en-US" sz="1200" b="0" i="0" dirty="0">
+                <a:effectLst/>
+                <a:latin typeface="Roboto Mono"/>
+              </a:rPr>
+              <a:t>=</a:t>
+            </a:r>
+            <a:r>
+              <a:rPr lang="en-US" sz="1200" b="0" i="0" dirty="0">
+                <a:solidFill>
+                  <a:srgbClr val="36464E"/>
+                </a:solidFill>
+                <a:effectLst/>
+                <a:latin typeface="Roboto Mono"/>
+              </a:rPr>
+              <a:t> </a:t>
+            </a:r>
+            <a:r>
+              <a:rPr lang="en-US" sz="1200" b="0" i="0" dirty="0">
+                <a:solidFill>
+                  <a:srgbClr val="C00000"/>
+                </a:solidFill>
+                <a:effectLst/>
+                <a:latin typeface="Roboto Mono"/>
+              </a:rPr>
+              <a:t>60 </a:t>
+            </a:r>
+          </a:p>
+          <a:p>
+            <a:r>
+              <a:rPr lang="en-US" sz="1200" b="0" i="0" dirty="0">
+                <a:solidFill>
+                  <a:srgbClr val="36464E"/>
+                </a:solidFill>
+                <a:effectLst/>
+                <a:latin typeface="Roboto Mono"/>
+              </a:rPr>
+              <a:t>strip </a:t>
+            </a:r>
+            <a:r>
+              <a:rPr lang="en-US" sz="1200" b="0" i="0" dirty="0">
+                <a:effectLst/>
+                <a:latin typeface="Roboto Mono"/>
+              </a:rPr>
+              <a:t>=</a:t>
+            </a:r>
+            <a:r>
+              <a:rPr lang="en-US" sz="1200" b="0" i="0" dirty="0">
+                <a:solidFill>
+                  <a:srgbClr val="36464E"/>
+                </a:solidFill>
+                <a:effectLst/>
+                <a:latin typeface="Roboto Mono"/>
+              </a:rPr>
+              <a:t> NeoPixel</a:t>
+            </a:r>
+            <a:r>
+              <a:rPr lang="en-US" sz="1200" b="0" i="0" dirty="0">
+                <a:effectLst/>
+                <a:latin typeface="Roboto Mono"/>
+              </a:rPr>
+              <a:t>(</a:t>
+            </a:r>
+            <a:r>
+              <a:rPr lang="en-US" sz="1200" b="0" i="0" dirty="0">
+                <a:solidFill>
+                  <a:srgbClr val="36464E"/>
+                </a:solidFill>
+                <a:effectLst/>
+                <a:latin typeface="Roboto Mono"/>
+              </a:rPr>
+              <a:t>machine</a:t>
+            </a:r>
+            <a:r>
+              <a:rPr lang="en-US" sz="1200" b="0" i="0" dirty="0">
+                <a:effectLst/>
+                <a:latin typeface="Roboto Mono"/>
+              </a:rPr>
+              <a:t>.</a:t>
+            </a:r>
+            <a:r>
+              <a:rPr lang="en-US" sz="1200" b="0" i="0" dirty="0">
+                <a:solidFill>
+                  <a:srgbClr val="36464E"/>
+                </a:solidFill>
+                <a:effectLst/>
+                <a:latin typeface="Roboto Mono"/>
+              </a:rPr>
+              <a:t>Pin</a:t>
+            </a:r>
+            <a:r>
+              <a:rPr lang="en-US" sz="1200" b="0" i="0" dirty="0">
+                <a:effectLst/>
+                <a:latin typeface="Roboto Mono"/>
+              </a:rPr>
+              <a:t>(</a:t>
+            </a:r>
+            <a:r>
+              <a:rPr lang="en-US" sz="1200" b="0" i="0" dirty="0">
+                <a:solidFill>
+                  <a:srgbClr val="36464E"/>
+                </a:solidFill>
+                <a:effectLst/>
+                <a:latin typeface="Roboto Mono"/>
+              </a:rPr>
+              <a:t>NEOPIXEL_PIN</a:t>
+            </a:r>
+            <a:r>
+              <a:rPr lang="en-US" sz="1200" b="0" i="0" dirty="0">
+                <a:effectLst/>
+                <a:latin typeface="Roboto Mono"/>
+              </a:rPr>
+              <a:t>),</a:t>
+            </a:r>
+            <a:r>
+              <a:rPr lang="en-US" sz="1200" b="0" i="0" dirty="0">
+                <a:solidFill>
+                  <a:srgbClr val="36464E"/>
+                </a:solidFill>
+                <a:effectLst/>
+                <a:latin typeface="Roboto Mono"/>
+              </a:rPr>
+              <a:t> NUMB_PIXELS</a:t>
+            </a:r>
+            <a:r>
+              <a:rPr lang="en-US" sz="1200" b="0" i="0" dirty="0">
+                <a:effectLst/>
+                <a:latin typeface="Roboto Mono"/>
+              </a:rPr>
+              <a:t>)</a:t>
+            </a:r>
+            <a:r>
+              <a:rPr lang="en-US" sz="1200" b="0" i="0" dirty="0">
+                <a:solidFill>
+                  <a:srgbClr val="36464E"/>
+                </a:solidFill>
+                <a:effectLst/>
+                <a:latin typeface="Roboto Mono"/>
+              </a:rPr>
+              <a:t> </a:t>
+            </a:r>
+            <a:endParaRPr lang="en-US" sz="1200" dirty="0">
+              <a:latin typeface="Arial Narrow" pitchFamily="34" charset="0"/>
+            </a:endParaRPr>
+          </a:p>
+        </p:txBody>
+      </p:sp>
+      <p:sp>
+        <p:nvSpPr>
+          <p:cNvPr id="26" name="Rounded Rectangle 25"/>
+          <p:cNvSpPr/>
           <p:nvPr/>
-        </p:nvGrpSpPr>
-        <p:grpSpPr>
+        </p:nvSpPr>
+        <p:spPr>
           <a:xfrm>
-            <a:off x="317500" y="545259"/>
-            <a:ext cx="6096000" cy="1026431"/>
-            <a:chOff x="333012" y="3025479"/>
-            <a:chExt cx="6096000" cy="1026431"/>
+            <a:off x="152400" y="504550"/>
+            <a:ext cx="1749062" cy="183093"/>
           </a:xfrm>
-        </p:grpSpPr>
-        <p:sp>
-          <p:nvSpPr>
-            <p:cNvPr id="4" name="TextBox 3"/>
-            <p:cNvSpPr txBox="1"/>
-            <p:nvPr/>
-          </p:nvSpPr>
-          <p:spPr>
-            <a:xfrm>
-              <a:off x="333012" y="3097803"/>
-              <a:ext cx="6096000" cy="954107"/>
-            </a:xfrm>
-            <a:prstGeom prst="rect">
-              <a:avLst/>
-            </a:prstGeom>
+          <a:prstGeom prst="roundRect">
+            <a:avLst/>
+          </a:prstGeom>
+          <a:ln w="19050">
             <a:solidFill>
-              <a:schemeClr val="bg1">
-                <a:lumMod val="95000"/>
-              </a:schemeClr>
+              <a:schemeClr val="tx1"/>
             </a:solidFill>
-            <a:ln>
-              <a:solidFill>
-                <a:schemeClr val="tx1"/>
-              </a:solidFill>
-            </a:ln>
-          </p:spPr>
-          <p:txBody>
-            <a:bodyPr wrap="square" rtlCol="0">
-              <a:spAutoFit/>
-            </a:bodyPr>
-            <a:lstStyle/>
-            <a:p>
-              <a:endParaRPr lang="en-US" sz="800" dirty="0">
-                <a:latin typeface="Arial Narrow" pitchFamily="34" charset="0"/>
-              </a:endParaRPr>
-            </a:p>
-            <a:p>
-              <a:r>
-                <a:rPr lang="en-US" sz="1200" dirty="0">
-                  <a:latin typeface="Arial Narrow" pitchFamily="34" charset="0"/>
-                </a:rPr>
-                <a:t>#include &lt;Adafruit_NeoPixel.h&gt;</a:t>
-              </a:r>
-            </a:p>
-            <a:p>
-              <a:r>
-                <a:rPr lang="en-US" sz="1200" dirty="0">
-                  <a:latin typeface="Arial Narrow" pitchFamily="34" charset="0"/>
-                </a:rPr>
-                <a:t>#define LEDPIN 12 </a:t>
-              </a:r>
-              <a:r>
-                <a:rPr lang="en-US" sz="1200" dirty="0">
-                  <a:solidFill>
-                    <a:srgbClr val="00B050"/>
-                  </a:solidFill>
-                  <a:latin typeface="Arial Narrow" pitchFamily="34" charset="0"/>
-                </a:rPr>
-                <a:t>// connect the Data from the strip to this pin on the Arduino</a:t>
-              </a:r>
-            </a:p>
-            <a:p>
-              <a:r>
-                <a:rPr lang="en-US" sz="1200" dirty="0">
-                  <a:latin typeface="Arial Narrow" pitchFamily="34" charset="0"/>
-                </a:rPr>
-                <a:t>#define NUMBER_PIXELS 60 /</a:t>
-              </a:r>
-              <a:r>
-                <a:rPr lang="en-US" sz="1200" dirty="0">
-                  <a:solidFill>
-                    <a:srgbClr val="00B050"/>
-                  </a:solidFill>
-                  <a:latin typeface="Arial Narrow" pitchFamily="34" charset="0"/>
-                </a:rPr>
-                <a:t>/ the number of pixels in your LED strip</a:t>
-              </a:r>
-            </a:p>
-            <a:p>
-              <a:r>
-                <a:rPr lang="en-US" sz="1200" dirty="0">
-                  <a:latin typeface="Arial Narrow" pitchFamily="34" charset="0"/>
-                </a:rPr>
-                <a:t>Adafruit_NeoPixel strip = </a:t>
-              </a:r>
-              <a:r>
-                <a:rPr lang="en-US" sz="1200" dirty="0" err="1">
-                  <a:latin typeface="Arial Narrow" pitchFamily="34" charset="0"/>
-                </a:rPr>
-                <a:t>Adafruit_NeoPixel</a:t>
-              </a:r>
-              <a:r>
-                <a:rPr lang="en-US" sz="1200" dirty="0">
-                  <a:latin typeface="Arial Narrow" pitchFamily="34" charset="0"/>
-                </a:rPr>
-                <a:t>(NUMBER_PIXELS, LEDPIN, NEO_GRB + NEO_KHZ800);</a:t>
-              </a:r>
-            </a:p>
-          </p:txBody>
-        </p:sp>
-        <p:sp>
-          <p:nvSpPr>
-            <p:cNvPr id="26" name="Rounded Rectangle 25"/>
-            <p:cNvSpPr/>
-            <p:nvPr/>
-          </p:nvSpPr>
-          <p:spPr>
-            <a:xfrm>
-              <a:off x="400050" y="3025479"/>
-              <a:ext cx="1123950" cy="183093"/>
-            </a:xfrm>
-            <a:prstGeom prst="roundRect">
-              <a:avLst/>
-            </a:prstGeom>
-            <a:ln w="19050">
-              <a:solidFill>
-                <a:schemeClr val="tx1"/>
-              </a:solidFill>
-            </a:ln>
-          </p:spPr>
-          <p:style>
-            <a:lnRef idx="2">
-              <a:schemeClr val="accent1">
-                <a:shade val="50000"/>
-              </a:schemeClr>
-            </a:lnRef>
-            <a:fillRef idx="1">
-              <a:schemeClr val="accent1"/>
-            </a:fillRef>
-            <a:effectRef idx="0">
-              <a:schemeClr val="accent1"/>
-            </a:effectRef>
-            <a:fontRef idx="minor">
-              <a:schemeClr val="lt1"/>
-            </a:fontRef>
-          </p:style>
-          <p:txBody>
-            <a:bodyPr rtlCol="0" anchor="ctr"/>
-            <a:lstStyle/>
-            <a:p>
-              <a:r>
-                <a:rPr lang="en-US" sz="1000" dirty="0"/>
-                <a:t>Sample Preamble</a:t>
-              </a:r>
-            </a:p>
-          </p:txBody>
-        </p:sp>
-      </p:grpSp>
-      <p:grpSp>
-        <p:nvGrpSpPr>
-          <p:cNvPr id="33" name="Group 32"/>
-          <p:cNvGrpSpPr/>
+          </a:ln>
+        </p:spPr>
+        <p:style>
+          <a:lnRef idx="2">
+            <a:schemeClr val="accent1">
+              <a:shade val="50000"/>
+            </a:schemeClr>
+          </a:lnRef>
+          <a:fillRef idx="1">
+            <a:schemeClr val="accent1"/>
+          </a:fillRef>
+          <a:effectRef idx="0">
+            <a:schemeClr val="accent1"/>
+          </a:effectRef>
+          <a:fontRef idx="minor">
+            <a:schemeClr val="lt1"/>
+          </a:fontRef>
+        </p:style>
+        <p:txBody>
+          <a:bodyPr rtlCol="0" anchor="ctr"/>
+          <a:lstStyle/>
+          <a:p>
+            <a:r>
+              <a:rPr lang="en-US" sz="1600" dirty="0"/>
+              <a:t>Sample Preamble</a:t>
+            </a:r>
+          </a:p>
+        </p:txBody>
+      </p:sp>
+      <p:sp>
+        <p:nvSpPr>
+          <p:cNvPr id="28" name="Rounded Rectangle 27"/>
+          <p:cNvSpPr/>
           <p:nvPr/>
-        </p:nvGrpSpPr>
-        <p:grpSpPr>
+        </p:nvSpPr>
+        <p:spPr>
           <a:xfrm>
-            <a:off x="323850" y="1708348"/>
-            <a:ext cx="5448300" cy="1381763"/>
-            <a:chOff x="342900" y="5060118"/>
-            <a:chExt cx="5448300" cy="1381763"/>
+            <a:off x="152400" y="1844971"/>
+            <a:ext cx="1987550" cy="183093"/>
           </a:xfrm>
-        </p:grpSpPr>
-        <p:sp>
-          <p:nvSpPr>
-            <p:cNvPr id="5" name="TextBox 4"/>
-            <p:cNvSpPr txBox="1"/>
-            <p:nvPr/>
-          </p:nvSpPr>
-          <p:spPr>
-            <a:xfrm>
-              <a:off x="342900" y="5118442"/>
-              <a:ext cx="5448300" cy="1323439"/>
-            </a:xfrm>
-            <a:prstGeom prst="rect">
-              <a:avLst/>
-            </a:prstGeom>
+          <a:prstGeom prst="roundRect">
+            <a:avLst/>
+          </a:prstGeom>
+          <a:ln w="19050">
             <a:solidFill>
-              <a:schemeClr val="bg1">
-                <a:lumMod val="95000"/>
-              </a:schemeClr>
+              <a:schemeClr val="tx1"/>
             </a:solidFill>
-            <a:ln>
-              <a:solidFill>
-                <a:schemeClr val="tx1"/>
-              </a:solidFill>
-            </a:ln>
-          </p:spPr>
-          <p:txBody>
-            <a:bodyPr wrap="square" rtlCol="0">
-              <a:spAutoFit/>
-            </a:bodyPr>
-            <a:lstStyle/>
-            <a:p>
-              <a:endParaRPr lang="en-US" sz="800" dirty="0">
-                <a:latin typeface="Arial Narrow" pitchFamily="34" charset="0"/>
-              </a:endParaRPr>
-            </a:p>
-            <a:p>
-              <a:r>
-                <a:rPr lang="en-US" sz="1200" b="1" dirty="0">
-                  <a:latin typeface="Arial" charset="0"/>
-                  <a:ea typeface="Arial" charset="0"/>
-                  <a:cs typeface="Arial" charset="0"/>
-                </a:rPr>
-                <a:t>void setup() </a:t>
-              </a:r>
-              <a:r>
-                <a:rPr lang="en-US" sz="1200" dirty="0">
-                  <a:latin typeface="Arial" charset="0"/>
-                  <a:ea typeface="Arial" charset="0"/>
-                  <a:cs typeface="Arial" charset="0"/>
-                </a:rPr>
-                <a:t>{</a:t>
-              </a:r>
-            </a:p>
-            <a:p>
-              <a:r>
-                <a:rPr lang="en-US" sz="1200" dirty="0">
-                  <a:latin typeface="Arial" charset="0"/>
-                  <a:ea typeface="Arial" charset="0"/>
-                  <a:cs typeface="Arial" charset="0"/>
-                </a:rPr>
-                <a:t>  strip.begin(); </a:t>
-              </a:r>
-              <a:r>
-                <a:rPr lang="en-US" sz="1200" dirty="0">
-                  <a:solidFill>
-                    <a:srgbClr val="00B050"/>
-                  </a:solidFill>
-                  <a:latin typeface="Arial" charset="0"/>
-                  <a:ea typeface="Arial" charset="0"/>
-                  <a:cs typeface="Arial" charset="0"/>
-                </a:rPr>
-                <a:t>// initialize all the variables </a:t>
-              </a:r>
-              <a:r>
-                <a:rPr lang="mr-IN" sz="1200" dirty="0">
-                  <a:solidFill>
-                    <a:srgbClr val="00B050"/>
-                  </a:solidFill>
-                  <a:latin typeface="Arial" charset="0"/>
-                  <a:ea typeface="Arial" charset="0"/>
-                  <a:cs typeface="Arial" charset="0"/>
-                </a:rPr>
-                <a:t>–</a:t>
-              </a:r>
-              <a:r>
-                <a:rPr lang="en-US" sz="1200" dirty="0">
-                  <a:solidFill>
-                    <a:srgbClr val="00B050"/>
-                  </a:solidFill>
-                  <a:latin typeface="Arial" charset="0"/>
-                  <a:ea typeface="Arial" charset="0"/>
-                  <a:cs typeface="Arial" charset="0"/>
-                </a:rPr>
-                <a:t> don’t forget this line!</a:t>
-              </a:r>
-            </a:p>
-            <a:p>
-              <a:r>
-                <a:rPr lang="en-US" sz="1200" dirty="0">
-                  <a:latin typeface="Arial" charset="0"/>
-                  <a:ea typeface="Arial" charset="0"/>
-                  <a:cs typeface="Arial" charset="0"/>
-                </a:rPr>
-                <a:t>  </a:t>
-              </a:r>
-              <a:r>
-                <a:rPr lang="en-US" sz="1200" dirty="0" err="1">
-                  <a:latin typeface="Arial" charset="0"/>
-                  <a:ea typeface="Arial" charset="0"/>
-                  <a:cs typeface="Arial" charset="0"/>
-                </a:rPr>
-                <a:t>strip.setPixelColor</a:t>
-              </a:r>
-              <a:r>
-                <a:rPr lang="en-US" sz="1200" dirty="0">
-                  <a:latin typeface="Arial" charset="0"/>
-                  <a:ea typeface="Arial" charset="0"/>
-                  <a:cs typeface="Arial" charset="0"/>
-                </a:rPr>
-                <a:t>(0, 255, 125, 0); </a:t>
-              </a:r>
-              <a:r>
-                <a:rPr lang="en-US" sz="1200" dirty="0">
-                  <a:solidFill>
-                    <a:srgbClr val="00B050"/>
-                  </a:solidFill>
-                  <a:latin typeface="Arial" charset="0"/>
-                  <a:ea typeface="Arial" charset="0"/>
-                  <a:cs typeface="Arial" charset="0"/>
-                </a:rPr>
-                <a:t>// set pixel 0 to be yellow</a:t>
-              </a:r>
-            </a:p>
-            <a:p>
-              <a:r>
-                <a:rPr lang="en-US" sz="1200" dirty="0">
-                  <a:latin typeface="Arial" charset="0"/>
-                  <a:ea typeface="Arial" charset="0"/>
-                  <a:cs typeface="Arial" charset="0"/>
-                </a:rPr>
-                <a:t>  strip.show(); </a:t>
-              </a:r>
-              <a:r>
-                <a:rPr lang="en-US" sz="1200" dirty="0">
-                  <a:solidFill>
-                    <a:srgbClr val="00B050"/>
-                  </a:solidFill>
-                  <a:latin typeface="Arial" charset="0"/>
-                  <a:ea typeface="Arial" charset="0"/>
-                  <a:cs typeface="Arial" charset="0"/>
-                </a:rPr>
-                <a:t>// send the data to the LED strip </a:t>
-              </a:r>
-              <a:r>
-                <a:rPr lang="mr-IN" sz="1200" dirty="0">
-                  <a:solidFill>
-                    <a:srgbClr val="00B050"/>
-                  </a:solidFill>
-                  <a:latin typeface="Arial" charset="0"/>
-                  <a:ea typeface="Arial" charset="0"/>
-                  <a:cs typeface="Arial" charset="0"/>
-                </a:rPr>
-                <a:t>–</a:t>
-              </a:r>
-              <a:r>
-                <a:rPr lang="en-US" sz="1200" dirty="0">
-                  <a:solidFill>
-                    <a:srgbClr val="00B050"/>
-                  </a:solidFill>
-                  <a:latin typeface="Arial" charset="0"/>
-                  <a:ea typeface="Arial" charset="0"/>
-                  <a:cs typeface="Arial" charset="0"/>
-                </a:rPr>
-                <a:t> must do this after any change</a:t>
-              </a:r>
-            </a:p>
-            <a:p>
-              <a:r>
-                <a:rPr lang="en-US" sz="1200" dirty="0">
-                  <a:latin typeface="Arial" charset="0"/>
-                  <a:ea typeface="Arial" charset="0"/>
-                  <a:cs typeface="Arial" charset="0"/>
-                </a:rPr>
-                <a:t>  delay(1000); </a:t>
-              </a:r>
-              <a:r>
-                <a:rPr lang="en-US" sz="1200" dirty="0">
-                  <a:solidFill>
-                    <a:srgbClr val="00B050"/>
-                  </a:solidFill>
-                  <a:latin typeface="Arial" charset="0"/>
-                  <a:ea typeface="Arial" charset="0"/>
-                  <a:cs typeface="Arial" charset="0"/>
-                </a:rPr>
-                <a:t> // wait 1 second</a:t>
-              </a:r>
-            </a:p>
-            <a:p>
-              <a:r>
-                <a:rPr lang="en-US" sz="1200" dirty="0">
-                  <a:latin typeface="Arial" charset="0"/>
-                  <a:ea typeface="Arial" charset="0"/>
-                  <a:cs typeface="Arial" charset="0"/>
-                </a:rPr>
-                <a:t>}</a:t>
-              </a:r>
-            </a:p>
-          </p:txBody>
-        </p:sp>
-        <p:sp>
-          <p:nvSpPr>
-            <p:cNvPr id="27" name="Rounded Rectangle 26"/>
-            <p:cNvSpPr/>
-            <p:nvPr/>
-          </p:nvSpPr>
-          <p:spPr>
-            <a:xfrm>
-              <a:off x="387350" y="5060118"/>
-              <a:ext cx="1123950" cy="183093"/>
-            </a:xfrm>
-            <a:prstGeom prst="roundRect">
-              <a:avLst/>
-            </a:prstGeom>
-            <a:ln w="19050">
-              <a:solidFill>
-                <a:schemeClr val="tx1"/>
-              </a:solidFill>
-            </a:ln>
-          </p:spPr>
-          <p:style>
-            <a:lnRef idx="2">
-              <a:schemeClr val="accent1">
-                <a:shade val="50000"/>
-              </a:schemeClr>
-            </a:lnRef>
-            <a:fillRef idx="1">
-              <a:schemeClr val="accent1"/>
-            </a:fillRef>
-            <a:effectRef idx="0">
-              <a:schemeClr val="accent1"/>
-            </a:effectRef>
-            <a:fontRef idx="minor">
-              <a:schemeClr val="lt1"/>
-            </a:fontRef>
-          </p:style>
-          <p:txBody>
-            <a:bodyPr rtlCol="0" anchor="ctr"/>
-            <a:lstStyle/>
-            <a:p>
-              <a:r>
-                <a:rPr lang="en-US" sz="1000" dirty="0"/>
-                <a:t>Sample Setup</a:t>
-              </a:r>
-            </a:p>
-          </p:txBody>
-        </p:sp>
-      </p:grpSp>
-      <p:grpSp>
-        <p:nvGrpSpPr>
-          <p:cNvPr id="34" name="Group 33"/>
-          <p:cNvGrpSpPr/>
-          <p:nvPr/>
-        </p:nvGrpSpPr>
-        <p:grpSpPr>
-          <a:xfrm>
-            <a:off x="313962" y="3228553"/>
-            <a:ext cx="5458188" cy="1772169"/>
-            <a:chOff x="323850" y="3387264"/>
-            <a:chExt cx="5458188" cy="1772169"/>
-          </a:xfrm>
-        </p:grpSpPr>
-        <p:sp>
-          <p:nvSpPr>
-            <p:cNvPr id="12" name="TextBox 11"/>
-            <p:cNvSpPr txBox="1"/>
-            <p:nvPr/>
-          </p:nvSpPr>
-          <p:spPr>
-            <a:xfrm>
-              <a:off x="323850" y="3466662"/>
-              <a:ext cx="5458188" cy="1692771"/>
-            </a:xfrm>
-            <a:prstGeom prst="rect">
-              <a:avLst/>
-            </a:prstGeom>
-            <a:solidFill>
-              <a:schemeClr val="bg1">
-                <a:lumMod val="95000"/>
-              </a:schemeClr>
-            </a:solidFill>
-            <a:ln>
-              <a:solidFill>
-                <a:schemeClr val="tx1"/>
-              </a:solidFill>
-            </a:ln>
-          </p:spPr>
-          <p:txBody>
-            <a:bodyPr wrap="square" rtlCol="0">
-              <a:spAutoFit/>
-            </a:bodyPr>
-            <a:lstStyle/>
-            <a:p>
-              <a:endParaRPr lang="en-US" sz="800" dirty="0">
-                <a:latin typeface="Arial Narrow" pitchFamily="34" charset="0"/>
-              </a:endParaRPr>
-            </a:p>
-            <a:p>
-              <a:r>
-                <a:rPr lang="en-US" sz="1200" b="1" dirty="0"/>
-                <a:t>void</a:t>
-              </a:r>
-              <a:r>
-                <a:rPr lang="en-US" sz="1200" dirty="0"/>
-                <a:t> </a:t>
-              </a:r>
-              <a:r>
-                <a:rPr lang="en-US" sz="1200" b="1" dirty="0"/>
-                <a:t>loop</a:t>
-              </a:r>
-              <a:r>
-                <a:rPr lang="en-US" sz="1200" dirty="0"/>
-                <a:t>() {</a:t>
-              </a:r>
-            </a:p>
-            <a:p>
-              <a:r>
-                <a:rPr lang="en-US" sz="1200" b="1" dirty="0"/>
-                <a:t>   for</a:t>
-              </a:r>
-              <a:r>
-                <a:rPr lang="en-US" sz="1200" dirty="0"/>
-                <a:t> (</a:t>
-              </a:r>
-              <a:r>
-                <a:rPr lang="en-US" sz="1200" b="1" dirty="0" err="1"/>
-                <a:t>int</a:t>
-              </a:r>
-              <a:r>
-                <a:rPr lang="en-US" sz="1200" dirty="0"/>
-                <a:t> </a:t>
-              </a:r>
-              <a:r>
-                <a:rPr lang="en-US" sz="1200" dirty="0" err="1"/>
-                <a:t>i</a:t>
-              </a:r>
-              <a:r>
-                <a:rPr lang="en-US" sz="1200" dirty="0"/>
-                <a:t>=0; </a:t>
-              </a:r>
-              <a:r>
-                <a:rPr lang="en-US" sz="1200" dirty="0" err="1"/>
-                <a:t>i</a:t>
-              </a:r>
-              <a:r>
-                <a:rPr lang="en-US" sz="1200" dirty="0"/>
-                <a:t>&lt;NUMBER_PIXELS; </a:t>
-              </a:r>
-              <a:r>
-                <a:rPr lang="en-US" sz="1200" dirty="0" err="1"/>
-                <a:t>i</a:t>
-              </a:r>
-              <a:r>
-                <a:rPr lang="en-US" sz="1200" dirty="0"/>
-                <a:t>++) {</a:t>
-              </a:r>
-            </a:p>
-            <a:p>
-              <a:r>
-                <a:rPr lang="en-US" sz="1200" dirty="0"/>
-                <a:t>       </a:t>
-              </a:r>
-              <a:r>
-                <a:rPr lang="en-US" sz="1200" dirty="0" err="1">
-                  <a:latin typeface="Arial" charset="0"/>
-                  <a:ea typeface="Arial" charset="0"/>
-                  <a:cs typeface="Arial" charset="0"/>
-                </a:rPr>
-                <a:t>strip.setPixelColor</a:t>
-              </a:r>
-              <a:r>
-                <a:rPr lang="en-US" sz="1200" dirty="0">
-                  <a:latin typeface="Arial" charset="0"/>
-                  <a:ea typeface="Arial" charset="0"/>
-                  <a:cs typeface="Arial" charset="0"/>
-                </a:rPr>
-                <a:t>(</a:t>
-              </a:r>
-              <a:r>
-                <a:rPr lang="en-US" sz="1200" dirty="0" err="1">
-                  <a:latin typeface="Arial" charset="0"/>
-                  <a:ea typeface="Arial" charset="0"/>
-                  <a:cs typeface="Arial" charset="0"/>
-                </a:rPr>
-                <a:t>i</a:t>
-              </a:r>
-              <a:r>
-                <a:rPr lang="en-US" sz="1200" dirty="0">
-                  <a:latin typeface="Arial" charset="0"/>
-                  <a:ea typeface="Arial" charset="0"/>
-                  <a:cs typeface="Arial" charset="0"/>
-                </a:rPr>
-                <a:t>, 255, 0, 0); </a:t>
-              </a:r>
-              <a:r>
-                <a:rPr lang="en-US" sz="1200" i="1" dirty="0">
-                  <a:solidFill>
-                    <a:srgbClr val="00B050"/>
-                  </a:solidFill>
-                  <a:latin typeface="Arial" charset="0"/>
-                  <a:ea typeface="Arial" charset="0"/>
-                  <a:cs typeface="Arial" charset="0"/>
-                </a:rPr>
-                <a:t>// turn the "</a:t>
-              </a:r>
-              <a:r>
-                <a:rPr lang="en-US" sz="1200" i="1" dirty="0" err="1">
-                  <a:solidFill>
-                    <a:srgbClr val="00B050"/>
-                  </a:solidFill>
-                  <a:latin typeface="Arial" charset="0"/>
-                  <a:ea typeface="Arial" charset="0"/>
-                  <a:cs typeface="Arial" charset="0"/>
-                </a:rPr>
-                <a:t>i"th</a:t>
-              </a:r>
-              <a:r>
-                <a:rPr lang="en-US" sz="1200" i="1" dirty="0">
-                  <a:solidFill>
-                    <a:srgbClr val="00B050"/>
-                  </a:solidFill>
-                  <a:latin typeface="Arial" charset="0"/>
-                  <a:ea typeface="Arial" charset="0"/>
-                  <a:cs typeface="Arial" charset="0"/>
-                </a:rPr>
-                <a:t> pixel on</a:t>
-              </a:r>
-              <a:endParaRPr lang="en-US" sz="1200" dirty="0">
-                <a:solidFill>
-                  <a:srgbClr val="00B050"/>
-                </a:solidFill>
-                <a:latin typeface="Arial" charset="0"/>
-                <a:ea typeface="Arial" charset="0"/>
-                <a:cs typeface="Arial" charset="0"/>
-              </a:endParaRPr>
-            </a:p>
-            <a:p>
-              <a:r>
-                <a:rPr lang="en-US" sz="1200" dirty="0">
-                  <a:solidFill>
-                    <a:srgbClr val="00B050"/>
-                  </a:solidFill>
-                  <a:latin typeface="Arial" charset="0"/>
-                  <a:ea typeface="Arial" charset="0"/>
-                  <a:cs typeface="Arial" charset="0"/>
-                </a:rPr>
-                <a:t>      </a:t>
-              </a:r>
-              <a:r>
-                <a:rPr lang="en-US" sz="1200" dirty="0" err="1">
-                  <a:latin typeface="Arial" charset="0"/>
-                  <a:ea typeface="Arial" charset="0"/>
-                  <a:cs typeface="Arial" charset="0"/>
-                </a:rPr>
-                <a:t>strip.show</a:t>
-              </a:r>
-              <a:r>
-                <a:rPr lang="en-US" sz="1200" dirty="0">
-                  <a:latin typeface="Arial" charset="0"/>
-                  <a:ea typeface="Arial" charset="0"/>
-                  <a:cs typeface="Arial" charset="0"/>
-                </a:rPr>
-                <a:t>();  </a:t>
-              </a:r>
-              <a:r>
-                <a:rPr lang="en-US" sz="1200" dirty="0">
-                  <a:solidFill>
-                    <a:srgbClr val="00B050"/>
-                  </a:solidFill>
-                  <a:latin typeface="Arial" charset="0"/>
-                  <a:ea typeface="Arial" charset="0"/>
-                  <a:cs typeface="Arial" charset="0"/>
-                </a:rPr>
-                <a:t>// send the data to the LED strip</a:t>
-              </a:r>
-              <a:endParaRPr lang="en-US" sz="1200" dirty="0">
-                <a:latin typeface="Arial" charset="0"/>
-                <a:ea typeface="Arial" charset="0"/>
-                <a:cs typeface="Arial" charset="0"/>
-              </a:endParaRPr>
-            </a:p>
-            <a:p>
-              <a:r>
-                <a:rPr lang="en-US" sz="1200" dirty="0">
-                  <a:latin typeface="Arial" charset="0"/>
-                  <a:ea typeface="Arial" charset="0"/>
-                  <a:cs typeface="Arial" charset="0"/>
-                </a:rPr>
-                <a:t>      delay(100);  </a:t>
-              </a:r>
-              <a:r>
-                <a:rPr lang="en-US" sz="1200" dirty="0">
-                  <a:solidFill>
-                    <a:srgbClr val="00B050"/>
-                  </a:solidFill>
-                  <a:latin typeface="Arial" charset="0"/>
-                  <a:ea typeface="Arial" charset="0"/>
-                  <a:cs typeface="Arial" charset="0"/>
-                </a:rPr>
-                <a:t>// </a:t>
-              </a:r>
-              <a:r>
-                <a:rPr lang="en-US" sz="1200" i="1" dirty="0">
-                  <a:solidFill>
-                    <a:srgbClr val="00B050"/>
-                  </a:solidFill>
-                  <a:latin typeface="Arial" charset="0"/>
-                  <a:ea typeface="Arial" charset="0"/>
-                  <a:cs typeface="Arial" charset="0"/>
-                </a:rPr>
-                <a:t>wait 1/10th of a second </a:t>
-              </a:r>
-              <a:r>
-                <a:rPr lang="mr-IN" sz="1200" i="1" dirty="0">
-                  <a:solidFill>
-                    <a:srgbClr val="00B050"/>
-                  </a:solidFill>
-                  <a:latin typeface="Arial" charset="0"/>
-                  <a:ea typeface="Arial" charset="0"/>
-                  <a:cs typeface="Arial" charset="0"/>
-                </a:rPr>
-                <a:t>–</a:t>
-              </a:r>
-              <a:r>
-                <a:rPr lang="en-US" sz="1200" i="1" dirty="0">
-                  <a:solidFill>
-                    <a:srgbClr val="00B050"/>
-                  </a:solidFill>
-                  <a:latin typeface="Arial" charset="0"/>
-                  <a:ea typeface="Arial" charset="0"/>
-                  <a:cs typeface="Arial" charset="0"/>
-                </a:rPr>
-                <a:t> a lower number makes it go faster</a:t>
-              </a:r>
-              <a:endParaRPr lang="en-US" sz="1200" dirty="0">
-                <a:solidFill>
-                  <a:srgbClr val="00B050"/>
-                </a:solidFill>
-                <a:latin typeface="Arial" charset="0"/>
-                <a:ea typeface="Arial" charset="0"/>
-                <a:cs typeface="Arial" charset="0"/>
-              </a:endParaRPr>
-            </a:p>
-            <a:p>
-              <a:r>
-                <a:rPr lang="en-US" sz="1200" dirty="0">
-                  <a:latin typeface="Arial" charset="0"/>
-                  <a:ea typeface="Arial" charset="0"/>
-                  <a:cs typeface="Arial" charset="0"/>
-                </a:rPr>
-                <a:t>      </a:t>
-              </a:r>
-              <a:r>
-                <a:rPr lang="en-US" sz="1200" dirty="0" err="1">
-                  <a:latin typeface="Arial" charset="0"/>
-                  <a:ea typeface="Arial" charset="0"/>
-                  <a:cs typeface="Arial" charset="0"/>
-                </a:rPr>
-                <a:t>strip.setPixelColor</a:t>
-              </a:r>
-              <a:r>
-                <a:rPr lang="en-US" sz="1200" dirty="0">
-                  <a:latin typeface="Arial" charset="0"/>
-                  <a:ea typeface="Arial" charset="0"/>
-                  <a:cs typeface="Arial" charset="0"/>
-                </a:rPr>
-                <a:t>(</a:t>
-              </a:r>
-              <a:r>
-                <a:rPr lang="en-US" sz="1200" dirty="0" err="1">
-                  <a:latin typeface="Arial" charset="0"/>
-                  <a:ea typeface="Arial" charset="0"/>
-                  <a:cs typeface="Arial" charset="0"/>
-                </a:rPr>
-                <a:t>i</a:t>
-              </a:r>
-              <a:r>
-                <a:rPr lang="en-US" sz="1200" dirty="0">
-                  <a:latin typeface="Arial" charset="0"/>
-                  <a:ea typeface="Arial" charset="0"/>
-                  <a:cs typeface="Arial" charset="0"/>
-                </a:rPr>
-                <a:t>, 0, 0, 0); </a:t>
-              </a:r>
-              <a:r>
-                <a:rPr lang="en-US" sz="1200" dirty="0">
-                  <a:solidFill>
-                    <a:srgbClr val="00B050"/>
-                  </a:solidFill>
-                  <a:latin typeface="Arial" charset="0"/>
-                  <a:ea typeface="Arial" charset="0"/>
-                  <a:cs typeface="Arial" charset="0"/>
-                </a:rPr>
-                <a:t>// </a:t>
-              </a:r>
-              <a:r>
-                <a:rPr lang="en-US" sz="1200" i="1" dirty="0">
-                  <a:solidFill>
-                    <a:srgbClr val="00B050"/>
-                  </a:solidFill>
-                  <a:latin typeface="Arial" charset="0"/>
-                  <a:ea typeface="Arial" charset="0"/>
-                  <a:cs typeface="Arial" charset="0"/>
-                </a:rPr>
-                <a:t>turn the "</a:t>
-              </a:r>
-              <a:r>
-                <a:rPr lang="en-US" sz="1200" i="1" dirty="0" err="1">
-                  <a:solidFill>
-                    <a:srgbClr val="00B050"/>
-                  </a:solidFill>
-                  <a:latin typeface="Arial" charset="0"/>
-                  <a:ea typeface="Arial" charset="0"/>
-                  <a:cs typeface="Arial" charset="0"/>
-                </a:rPr>
-                <a:t>i"th</a:t>
-              </a:r>
-              <a:r>
-                <a:rPr lang="en-US" sz="1200" i="1" dirty="0">
-                  <a:solidFill>
-                    <a:srgbClr val="00B050"/>
-                  </a:solidFill>
-                  <a:latin typeface="Arial" charset="0"/>
-                  <a:ea typeface="Arial" charset="0"/>
-                  <a:cs typeface="Arial" charset="0"/>
-                </a:rPr>
-                <a:t> pixel off</a:t>
-              </a:r>
-              <a:endParaRPr lang="en-US" sz="1200" dirty="0">
-                <a:solidFill>
-                  <a:srgbClr val="00B050"/>
-                </a:solidFill>
-                <a:latin typeface="Arial" charset="0"/>
-                <a:ea typeface="Arial" charset="0"/>
-                <a:cs typeface="Arial" charset="0"/>
-              </a:endParaRPr>
-            </a:p>
-            <a:p>
-              <a:r>
-                <a:rPr lang="en-US" sz="1200" dirty="0">
-                  <a:latin typeface="Arial" charset="0"/>
-                  <a:ea typeface="Arial" charset="0"/>
-                  <a:cs typeface="Arial" charset="0"/>
-                </a:rPr>
-                <a:t>   }</a:t>
-              </a:r>
-            </a:p>
-            <a:p>
-              <a:r>
-                <a:rPr lang="en-US" sz="1200" dirty="0"/>
-                <a:t>}</a:t>
-              </a:r>
-              <a:endParaRPr lang="en-US" sz="1200" dirty="0">
-                <a:latin typeface="Arial Narrow" pitchFamily="34" charset="0"/>
-              </a:endParaRPr>
-            </a:p>
-          </p:txBody>
-        </p:sp>
-        <p:sp>
-          <p:nvSpPr>
-            <p:cNvPr id="28" name="Rounded Rectangle 27"/>
-            <p:cNvSpPr/>
-            <p:nvPr/>
-          </p:nvSpPr>
-          <p:spPr>
-            <a:xfrm>
-              <a:off x="384538" y="3387264"/>
-              <a:ext cx="1536700" cy="183093"/>
-            </a:xfrm>
-            <a:prstGeom prst="roundRect">
-              <a:avLst/>
-            </a:prstGeom>
-            <a:ln w="19050">
-              <a:solidFill>
-                <a:schemeClr val="tx1"/>
-              </a:solidFill>
-            </a:ln>
-          </p:spPr>
-          <p:style>
-            <a:lnRef idx="2">
-              <a:schemeClr val="accent1">
-                <a:shade val="50000"/>
-              </a:schemeClr>
-            </a:lnRef>
-            <a:fillRef idx="1">
-              <a:schemeClr val="accent1"/>
-            </a:fillRef>
-            <a:effectRef idx="0">
-              <a:schemeClr val="accent1"/>
-            </a:effectRef>
-            <a:fontRef idx="minor">
-              <a:schemeClr val="lt1"/>
-            </a:fontRef>
-          </p:style>
-          <p:txBody>
-            <a:bodyPr rtlCol="0" anchor="ctr"/>
-            <a:lstStyle/>
-            <a:p>
-              <a:r>
-                <a:rPr lang="en-US" sz="1000" dirty="0"/>
-                <a:t>Sample Moving Pixel</a:t>
-              </a:r>
-            </a:p>
-          </p:txBody>
-        </p:sp>
-      </p:grpSp>
+          </a:ln>
+        </p:spPr>
+        <p:style>
+          <a:lnRef idx="2">
+            <a:schemeClr val="accent1">
+              <a:shade val="50000"/>
+            </a:schemeClr>
+          </a:lnRef>
+          <a:fillRef idx="1">
+            <a:schemeClr val="accent1"/>
+          </a:fillRef>
+          <a:effectRef idx="0">
+            <a:schemeClr val="accent1"/>
+          </a:effectRef>
+          <a:fontRef idx="minor">
+            <a:schemeClr val="lt1"/>
+          </a:fontRef>
+        </p:style>
+        <p:txBody>
+          <a:bodyPr rtlCol="0" anchor="ctr"/>
+          <a:lstStyle/>
+          <a:p>
+            <a:r>
+              <a:rPr lang="en-US" sz="1600" dirty="0"/>
+              <a:t>Sample Moving Pixel</a:t>
+            </a:r>
+          </a:p>
+        </p:txBody>
+      </p:sp>
       <p:grpSp>
         <p:nvGrpSpPr>
           <p:cNvPr id="35" name="Group 34"/>
@@ -5509,10 +5238,10 @@
         </p:nvGrpSpPr>
         <p:grpSpPr>
           <a:xfrm>
-            <a:off x="313962" y="5105520"/>
-            <a:ext cx="6019800" cy="3586923"/>
-            <a:chOff x="640987" y="7881107"/>
-            <a:chExt cx="6019800" cy="3586923"/>
+            <a:off x="192709" y="4194098"/>
+            <a:ext cx="6528302" cy="4462650"/>
+            <a:chOff x="598977" y="7913830"/>
+            <a:chExt cx="6028082" cy="4462650"/>
           </a:xfrm>
         </p:grpSpPr>
         <p:sp>
@@ -5523,8 +5252,8 @@
           </p:nvSpPr>
           <p:spPr>
             <a:xfrm>
-              <a:off x="640987" y="7959377"/>
-              <a:ext cx="6019800" cy="3508653"/>
+              <a:off x="607259" y="8129163"/>
+              <a:ext cx="6019800" cy="4247317"/>
             </a:xfrm>
             <a:prstGeom prst="rect">
               <a:avLst/>
@@ -5548,7 +5277,7 @@
               </a:pPr>
               <a:r>
                 <a:rPr lang="en-US" sz="1200" dirty="0"/>
-                <a:t>Learn how to solder solid wires to ends of battery pack</a:t>
+                <a:t>Press the forward (FWD) and back (REV) mode buttons to change the pattern</a:t>
               </a:r>
             </a:p>
             <a:p>
@@ -5558,7 +5287,7 @@
               </a:pPr>
               <a:r>
                 <a:rPr lang="en-US" sz="1200" dirty="0"/>
-                <a:t>Hook up battery to breadboard rails</a:t>
+                <a:t>Get "blink" lab to work</a:t>
               </a:r>
             </a:p>
             <a:p>
@@ -5568,7 +5297,7 @@
               </a:pPr>
               <a:r>
                 <a:rPr lang="en-US" sz="1200" dirty="0"/>
-                <a:t>Hook up LED circuit in series with 330 ohm resistor</a:t>
+                <a:t>Change the color of the blink lab</a:t>
               </a:r>
             </a:p>
             <a:p>
@@ -5578,7 +5307,7 @@
               </a:pPr>
               <a:r>
                 <a:rPr lang="en-US" sz="1200" dirty="0"/>
-                <a:t>Add a button to turn on and off the LED</a:t>
+                <a:t>Change the “delay” time in the blink lab – what happens around 0.01 seconds?</a:t>
               </a:r>
             </a:p>
             <a:p>
@@ -5588,7 +5317,7 @@
               </a:pPr>
               <a:r>
                 <a:rPr lang="en-US" sz="1200" dirty="0"/>
-                <a:t>Plug in Arduino Nano to breadboard</a:t>
+                <a:t>Make a single pixel fade in and out</a:t>
               </a:r>
             </a:p>
             <a:p>
@@ -5598,7 +5327,7 @@
               </a:pPr>
               <a:r>
                 <a:rPr lang="en-US" sz="1200" dirty="0"/>
-                <a:t>Connect 5v and GND wires and verify the LEDs on Arduino work</a:t>
+                <a:t>Simulate a heartbeat pattern (on for 1/10 of a second, off for 1.5 seconds)</a:t>
               </a:r>
             </a:p>
             <a:p>
@@ -5608,7 +5337,7 @@
               </a:pPr>
               <a:r>
                 <a:rPr lang="en-US" sz="1200" dirty="0"/>
-                <a:t>Download Arduino IDE software and plug in USB cable</a:t>
+                <a:t>Make a pixel appear to move from one pixel to the next</a:t>
               </a:r>
             </a:p>
             <a:p>
@@ -5618,7 +5347,7 @@
               </a:pPr>
               <a:r>
                 <a:rPr lang="en-US" sz="1200" dirty="0"/>
-                <a:t>Get "blink" lab to work (configure board and port) and use upload button</a:t>
+                <a:t>Change the color and speed of the moving pixel</a:t>
               </a:r>
             </a:p>
             <a:p>
@@ -5628,7 +5357,7 @@
               </a:pPr>
               <a:r>
                 <a:rPr lang="en-US" sz="1200" dirty="0"/>
-                <a:t>Change the “delay” time in the blink lab from 10 to 1000 milliseconds</a:t>
+                <a:t>Try one of the 20 patterns in the lessons section</a:t>
               </a:r>
             </a:p>
             <a:p>
@@ -5638,83 +5367,7 @@
               </a:pPr>
               <a:r>
                 <a:rPr lang="en-US" sz="1200" dirty="0"/>
-                <a:t>Download NeoPixel libraries</a:t>
-              </a:r>
-            </a:p>
-            <a:p>
-              <a:pPr marL="342900" indent="-342900">
-                <a:buFont typeface="+mj-lt"/>
-                <a:buAutoNum type="arabicPeriod"/>
-              </a:pPr>
-              <a:r>
-                <a:rPr lang="en-US" sz="1200" dirty="0"/>
-                <a:t>Connect NeoPixel strip to pin 12</a:t>
-              </a:r>
-            </a:p>
-            <a:p>
-              <a:pPr marL="342900" indent="-342900">
-                <a:buFont typeface="+mj-lt"/>
-                <a:buAutoNum type="arabicPeriod"/>
-              </a:pPr>
-              <a:r>
-                <a:rPr lang="en-US" sz="1200" dirty="0"/>
-                <a:t>Run NeoPixel example programs (</a:t>
-              </a:r>
-              <a:r>
-                <a:rPr lang="en-US" sz="1200" dirty="0" err="1"/>
-                <a:t>strandtest</a:t>
-              </a:r>
-              <a:r>
-                <a:rPr lang="en-US" sz="1200" dirty="0"/>
-                <a:t>)</a:t>
-              </a:r>
-            </a:p>
-            <a:p>
-              <a:pPr marL="342900" indent="-342900">
-                <a:buFont typeface="+mj-lt"/>
-                <a:buAutoNum type="arabicPeriod"/>
-              </a:pPr>
-              <a:r>
-                <a:rPr lang="en-US" sz="1200" dirty="0"/>
-                <a:t>Find Moving Rainbow examples</a:t>
-              </a:r>
-            </a:p>
-            <a:p>
-              <a:pPr marL="342900" indent="-342900">
-                <a:buFont typeface="+mj-lt"/>
-                <a:buAutoNum type="arabicPeriod"/>
-              </a:pPr>
-              <a:r>
-                <a:rPr lang="en-US" sz="1200" dirty="0"/>
-                <a:t>Work though various examples</a:t>
-              </a:r>
-            </a:p>
-            <a:p>
-              <a:pPr marL="342900" indent="-342900">
-                <a:buFont typeface="+mj-lt"/>
-                <a:buAutoNum type="arabicPeriod"/>
-              </a:pPr>
-              <a:r>
-                <a:rPr lang="en-US" sz="1200" dirty="0"/>
-                <a:t>On moving rainbow github/</a:t>
-              </a:r>
-              <a:r>
-                <a:rPr lang="en-US" sz="1200" dirty="0" err="1"/>
-                <a:t>src</a:t>
-              </a:r>
-              <a:r>
-                <a:rPr lang="en-US" sz="1200" dirty="0"/>
-                <a:t> find mini-maker-fair LED strip two buttons program</a:t>
-              </a:r>
-            </a:p>
-            <a:p>
-              <a:pPr marL="342900" indent="-342900">
-                <a:buFont typeface="+mj-lt"/>
-                <a:buAutoNum type="arabicPeriod"/>
-              </a:pPr>
-              <a:r>
-                <a:rPr lang="en-US" sz="1200" dirty="0"/>
-                <a:t>Wire button from D2 (interrupt) to ground</a:t>
+                <a:t>Add debug code to the button press code.  Use another pin for the buttons.</a:t>
               </a:r>
             </a:p>
             <a:p>
@@ -5737,6 +5390,106 @@
                 <a:t>Create your own mode pattern</a:t>
               </a:r>
             </a:p>
+            <a:p>
+              <a:pPr marL="342900" indent="-342900">
+                <a:buFont typeface="+mj-lt"/>
+                <a:buAutoNum type="arabicPeriod"/>
+              </a:pPr>
+              <a:r>
+                <a:rPr lang="en-US" sz="1200" dirty="0"/>
+                <a:t>Learn how to solder solid wires to ends of an LED strip or battery pack</a:t>
+              </a:r>
+            </a:p>
+            <a:p>
+              <a:pPr marL="342900" indent="-342900">
+                <a:buFont typeface="+mj-lt"/>
+                <a:buAutoNum type="arabicPeriod"/>
+              </a:pPr>
+              <a:r>
+                <a:rPr lang="en-US" sz="1200" dirty="0"/>
+                <a:t>Hook up a battery to breadboard rails</a:t>
+              </a:r>
+            </a:p>
+            <a:p>
+              <a:pPr marL="342900" indent="-342900">
+                <a:buFont typeface="+mj-lt"/>
+                <a:buAutoNum type="arabicPeriod"/>
+              </a:pPr>
+              <a:r>
+                <a:rPr lang="en-US" sz="1200" dirty="0"/>
+                <a:t>Connect 5v, GND and DATA wires and verify the LED strip works</a:t>
+              </a:r>
+            </a:p>
+            <a:p>
+              <a:pPr marL="342900" indent="-342900">
+                <a:buFont typeface="+mj-lt"/>
+                <a:buAutoNum type="arabicPeriod"/>
+              </a:pPr>
+              <a:r>
+                <a:rPr lang="en-US" sz="1200" dirty="0"/>
+                <a:t>Hook up LED circuit in series with 330-ohm resistor</a:t>
+              </a:r>
+            </a:p>
+            <a:p>
+              <a:pPr marL="342900" indent="-342900">
+                <a:buFont typeface="+mj-lt"/>
+                <a:buAutoNum type="arabicPeriod"/>
+              </a:pPr>
+              <a:r>
+                <a:rPr lang="en-US" sz="1200" dirty="0"/>
+                <a:t>Create a web page and use it to control the colors of the LED strip</a:t>
+              </a:r>
+            </a:p>
+            <a:p>
+              <a:pPr marL="342900" indent="-342900">
+                <a:buFont typeface="+mj-lt"/>
+                <a:buAutoNum type="arabicPeriod"/>
+              </a:pPr>
+              <a:r>
+                <a:rPr lang="en-US" sz="1200" dirty="0"/>
+                <a:t>Use your phone to change the colors of the LED strip</a:t>
+              </a:r>
+            </a:p>
+            <a:p>
+              <a:pPr marL="342900" indent="-342900">
+                <a:buFont typeface="+mj-lt"/>
+                <a:buAutoNum type="arabicPeriod"/>
+              </a:pPr>
+              <a:r>
+                <a:rPr lang="en-US" sz="1200" dirty="0"/>
+                <a:t>Create a program that gets the weather report from a web service</a:t>
+              </a:r>
+            </a:p>
+            <a:p>
+              <a:pPr marL="342900" indent="-342900">
+                <a:buFont typeface="+mj-lt"/>
+                <a:buAutoNum type="arabicPeriod"/>
+              </a:pPr>
+              <a:r>
+                <a:rPr lang="en-US" sz="1200" dirty="0"/>
+                <a:t>Hook up an OLED display to your kit and practice some drawing</a:t>
+              </a:r>
+            </a:p>
+            <a:p>
+              <a:pPr marL="342900" indent="-342900">
+                <a:buFont typeface="+mj-lt"/>
+                <a:buAutoNum type="arabicPeriod"/>
+              </a:pPr>
+              <a:r>
+                <a:rPr lang="en-US" sz="1200" dirty="0"/>
+                <a:t>Walk around and ask people about their career and what they enjoy</a:t>
+              </a:r>
+            </a:p>
+            <a:p>
+              <a:pPr marL="342900" indent="-342900">
+                <a:buFont typeface="+mj-lt"/>
+                <a:buAutoNum type="arabicPeriod"/>
+              </a:pPr>
+              <a:r>
+                <a:rPr lang="en-US" sz="1200" dirty="0"/>
+                <a:t>Visit the CoderDojoTC Micropython site: https://www.coderdojotc.org/micropython</a:t>
+              </a:r>
+            </a:p>
           </p:txBody>
         </p:sp>
         <p:sp>
@@ -5747,8 +5500,8 @@
           </p:nvSpPr>
           <p:spPr>
             <a:xfrm>
-              <a:off x="727438" y="7881107"/>
-              <a:ext cx="914400" cy="154777"/>
+              <a:off x="598977" y="7913830"/>
+              <a:ext cx="1266100" cy="215333"/>
             </a:xfrm>
             <a:prstGeom prst="roundRect">
               <a:avLst/>
@@ -5781,13 +5534,840 @@
             <a:p>
               <a:pPr algn="ctr"/>
               <a:r>
-                <a:rPr lang="en-US" sz="1000" dirty="0"/>
+                <a:rPr lang="en-US" sz="1600" dirty="0"/>
                 <a:t>Sample Labs</a:t>
               </a:r>
             </a:p>
           </p:txBody>
         </p:sp>
       </p:grpSp>
+      <p:sp>
+        <p:nvSpPr>
+          <p:cNvPr id="7" name="TextBox 6">
+            <a:extLst>
+              <a:ext uri="{FF2B5EF4-FFF2-40B4-BE49-F238E27FC236}">
+                <a16:creationId xmlns:a16="http://schemas.microsoft.com/office/drawing/2014/main" id="{14CA04E6-CD52-F343-A127-AB62EB638016}"/>
+              </a:ext>
+            </a:extLst>
+          </p:cNvPr>
+          <p:cNvSpPr txBox="1"/>
+          <p:nvPr/>
+        </p:nvSpPr>
+        <p:spPr>
+          <a:xfrm>
+            <a:off x="1615708" y="4094175"/>
+            <a:ext cx="4886588" cy="338554"/>
+          </a:xfrm>
+          <a:prstGeom prst="rect">
+            <a:avLst/>
+          </a:prstGeom>
+          <a:noFill/>
+        </p:spPr>
+        <p:txBody>
+          <a:bodyPr wrap="square">
+            <a:spAutoFit/>
+          </a:bodyPr>
+          <a:lstStyle/>
+          <a:p>
+            <a:r>
+              <a:rPr lang="en-US" sz="1600" dirty="0"/>
+              <a:t>http://</a:t>
+            </a:r>
+            <a:r>
+              <a:rPr lang="en-US" sz="1600" dirty="0" err="1"/>
+              <a:t>dmccreary.github.io</a:t>
+            </a:r>
+            <a:r>
+              <a:rPr lang="en-US" sz="1600" dirty="0"/>
+              <a:t>/moving-rainbow/lessons</a:t>
+            </a:r>
+          </a:p>
+        </p:txBody>
+      </p:sp>
+      <p:sp>
+        <p:nvSpPr>
+          <p:cNvPr id="8" name="TextBox 7">
+            <a:extLst>
+              <a:ext uri="{FF2B5EF4-FFF2-40B4-BE49-F238E27FC236}">
+                <a16:creationId xmlns:a16="http://schemas.microsoft.com/office/drawing/2014/main" id="{FFE29DD4-FD0B-791A-F43B-6C8641D21341}"/>
+              </a:ext>
+            </a:extLst>
+          </p:cNvPr>
+          <p:cNvSpPr txBox="1"/>
+          <p:nvPr/>
+        </p:nvSpPr>
+        <p:spPr>
+          <a:xfrm>
+            <a:off x="4766630" y="2023409"/>
+            <a:ext cx="1954381" cy="1938992"/>
+          </a:xfrm>
+          <a:prstGeom prst="rect">
+            <a:avLst/>
+          </a:prstGeom>
+          <a:noFill/>
+          <a:ln>
+            <a:solidFill>
+              <a:schemeClr val="tx1"/>
+            </a:solidFill>
+          </a:ln>
+        </p:spPr>
+        <p:txBody>
+          <a:bodyPr wrap="none" rtlCol="0">
+            <a:spAutoFit/>
+          </a:bodyPr>
+          <a:lstStyle/>
+          <a:p>
+            <a:endParaRPr lang="en-US" sz="1000" dirty="0">
+              <a:solidFill>
+                <a:srgbClr val="29363D"/>
+              </a:solidFill>
+              <a:latin typeface="Menlo-Regular" panose="020B0609030804020204" pitchFamily="49" charset="0"/>
+            </a:endParaRPr>
+          </a:p>
+          <a:p>
+            <a:r>
+              <a:rPr lang="en-US" sz="1000" dirty="0">
+                <a:solidFill>
+                  <a:srgbClr val="29363D"/>
+                </a:solidFill>
+                <a:latin typeface="Menlo-Regular" panose="020B0609030804020204" pitchFamily="49" charset="0"/>
+              </a:rPr>
+              <a:t>red </a:t>
+            </a:r>
+            <a:r>
+              <a:rPr lang="en-US" sz="1000" dirty="0">
+                <a:solidFill>
+                  <a:prstClr val="black"/>
+                </a:solidFill>
+                <a:latin typeface="Menlo-Regular" panose="020B0609030804020204" pitchFamily="49" charset="0"/>
+              </a:rPr>
+              <a:t>=</a:t>
+            </a:r>
+            <a:r>
+              <a:rPr lang="en-US" sz="1000" dirty="0">
+                <a:solidFill>
+                  <a:srgbClr val="29363D"/>
+                </a:solidFill>
+                <a:latin typeface="Menlo-Regular" panose="020B0609030804020204" pitchFamily="49" charset="0"/>
+              </a:rPr>
+              <a:t> </a:t>
+            </a:r>
+            <a:r>
+              <a:rPr lang="en-US" sz="1000" dirty="0">
+                <a:solidFill>
+                  <a:prstClr val="black"/>
+                </a:solidFill>
+                <a:latin typeface="Menlo-Regular" panose="020B0609030804020204" pitchFamily="49" charset="0"/>
+              </a:rPr>
+              <a:t>(255,</a:t>
+            </a:r>
+            <a:r>
+              <a:rPr lang="en-US" sz="1000" dirty="0">
+                <a:solidFill>
+                  <a:srgbClr val="29363D"/>
+                </a:solidFill>
+                <a:latin typeface="Menlo-Regular" panose="020B0609030804020204" pitchFamily="49" charset="0"/>
+              </a:rPr>
+              <a:t> </a:t>
+            </a:r>
+            <a:r>
+              <a:rPr lang="en-US" sz="1000" dirty="0">
+                <a:solidFill>
+                  <a:prstClr val="black"/>
+                </a:solidFill>
+                <a:latin typeface="Menlo-Regular" panose="020B0609030804020204" pitchFamily="49" charset="0"/>
+              </a:rPr>
+              <a:t>0,</a:t>
+            </a:r>
+            <a:r>
+              <a:rPr lang="en-US" sz="1000" dirty="0">
+                <a:solidFill>
+                  <a:srgbClr val="29363D"/>
+                </a:solidFill>
+                <a:latin typeface="Menlo-Regular" panose="020B0609030804020204" pitchFamily="49" charset="0"/>
+              </a:rPr>
+              <a:t> </a:t>
+            </a:r>
+            <a:r>
+              <a:rPr lang="en-US" sz="1000" dirty="0">
+                <a:solidFill>
+                  <a:prstClr val="black"/>
+                </a:solidFill>
+                <a:latin typeface="Menlo-Regular" panose="020B0609030804020204" pitchFamily="49" charset="0"/>
+              </a:rPr>
+              <a:t>0)</a:t>
+            </a:r>
+          </a:p>
+          <a:p>
+            <a:r>
+              <a:rPr lang="en-US" sz="1000" dirty="0">
+                <a:solidFill>
+                  <a:srgbClr val="29363D"/>
+                </a:solidFill>
+                <a:latin typeface="Menlo-Regular" panose="020B0609030804020204" pitchFamily="49" charset="0"/>
+              </a:rPr>
+              <a:t>orange </a:t>
+            </a:r>
+            <a:r>
+              <a:rPr lang="en-US" sz="1000" dirty="0">
+                <a:solidFill>
+                  <a:prstClr val="black"/>
+                </a:solidFill>
+                <a:latin typeface="Menlo-Regular" panose="020B0609030804020204" pitchFamily="49" charset="0"/>
+              </a:rPr>
+              <a:t>=</a:t>
+            </a:r>
+            <a:r>
+              <a:rPr lang="en-US" sz="1000" dirty="0">
+                <a:solidFill>
+                  <a:srgbClr val="29363D"/>
+                </a:solidFill>
+                <a:latin typeface="Menlo-Regular" panose="020B0609030804020204" pitchFamily="49" charset="0"/>
+              </a:rPr>
+              <a:t> </a:t>
+            </a:r>
+            <a:r>
+              <a:rPr lang="en-US" sz="1000" dirty="0">
+                <a:solidFill>
+                  <a:prstClr val="black"/>
+                </a:solidFill>
+                <a:latin typeface="Menlo-Regular" panose="020B0609030804020204" pitchFamily="49" charset="0"/>
+              </a:rPr>
+              <a:t>(140,</a:t>
+            </a:r>
+            <a:r>
+              <a:rPr lang="en-US" sz="1000" dirty="0">
+                <a:solidFill>
+                  <a:srgbClr val="29363D"/>
+                </a:solidFill>
+                <a:latin typeface="Menlo-Regular" panose="020B0609030804020204" pitchFamily="49" charset="0"/>
+              </a:rPr>
+              <a:t> </a:t>
+            </a:r>
+            <a:r>
+              <a:rPr lang="en-US" sz="1000" dirty="0">
+                <a:solidFill>
+                  <a:prstClr val="black"/>
+                </a:solidFill>
+                <a:latin typeface="Menlo-Regular" panose="020B0609030804020204" pitchFamily="49" charset="0"/>
+              </a:rPr>
+              <a:t>60,</a:t>
+            </a:r>
+            <a:r>
+              <a:rPr lang="en-US" sz="1000" dirty="0">
+                <a:solidFill>
+                  <a:srgbClr val="29363D"/>
+                </a:solidFill>
+                <a:latin typeface="Menlo-Regular" panose="020B0609030804020204" pitchFamily="49" charset="0"/>
+              </a:rPr>
+              <a:t> </a:t>
+            </a:r>
+            <a:r>
+              <a:rPr lang="en-US" sz="1000" dirty="0">
+                <a:solidFill>
+                  <a:prstClr val="black"/>
+                </a:solidFill>
+                <a:latin typeface="Menlo-Regular" panose="020B0609030804020204" pitchFamily="49" charset="0"/>
+              </a:rPr>
+              <a:t>0)</a:t>
+            </a:r>
+          </a:p>
+          <a:p>
+            <a:r>
+              <a:rPr lang="en-US" sz="1000" dirty="0">
+                <a:solidFill>
+                  <a:srgbClr val="29363D"/>
+                </a:solidFill>
+                <a:latin typeface="Menlo-Regular" panose="020B0609030804020204" pitchFamily="49" charset="0"/>
+              </a:rPr>
+              <a:t>yellow </a:t>
+            </a:r>
+            <a:r>
+              <a:rPr lang="en-US" sz="1000" dirty="0">
+                <a:solidFill>
+                  <a:prstClr val="black"/>
+                </a:solidFill>
+                <a:latin typeface="Menlo-Regular" panose="020B0609030804020204" pitchFamily="49" charset="0"/>
+              </a:rPr>
+              <a:t>=</a:t>
+            </a:r>
+            <a:r>
+              <a:rPr lang="en-US" sz="1000" dirty="0">
+                <a:solidFill>
+                  <a:srgbClr val="29363D"/>
+                </a:solidFill>
+                <a:latin typeface="Menlo-Regular" panose="020B0609030804020204" pitchFamily="49" charset="0"/>
+              </a:rPr>
+              <a:t> </a:t>
+            </a:r>
+            <a:r>
+              <a:rPr lang="en-US" sz="1000" dirty="0">
+                <a:solidFill>
+                  <a:prstClr val="black"/>
+                </a:solidFill>
+                <a:latin typeface="Menlo-Regular" panose="020B0609030804020204" pitchFamily="49" charset="0"/>
+              </a:rPr>
+              <a:t>(255,</a:t>
+            </a:r>
+            <a:r>
+              <a:rPr lang="en-US" sz="1000" dirty="0">
+                <a:solidFill>
+                  <a:srgbClr val="29363D"/>
+                </a:solidFill>
+                <a:latin typeface="Menlo-Regular" panose="020B0609030804020204" pitchFamily="49" charset="0"/>
+              </a:rPr>
+              <a:t> </a:t>
+            </a:r>
+            <a:r>
+              <a:rPr lang="en-US" sz="1000" dirty="0">
+                <a:solidFill>
+                  <a:prstClr val="black"/>
+                </a:solidFill>
+                <a:latin typeface="Menlo-Regular" panose="020B0609030804020204" pitchFamily="49" charset="0"/>
+              </a:rPr>
+              <a:t>255,</a:t>
+            </a:r>
+            <a:r>
+              <a:rPr lang="en-US" sz="1000" dirty="0">
+                <a:solidFill>
+                  <a:srgbClr val="29363D"/>
+                </a:solidFill>
+                <a:latin typeface="Menlo-Regular" panose="020B0609030804020204" pitchFamily="49" charset="0"/>
+              </a:rPr>
+              <a:t> </a:t>
+            </a:r>
+            <a:r>
+              <a:rPr lang="en-US" sz="1000" dirty="0">
+                <a:solidFill>
+                  <a:prstClr val="black"/>
+                </a:solidFill>
+                <a:latin typeface="Menlo-Regular" panose="020B0609030804020204" pitchFamily="49" charset="0"/>
+              </a:rPr>
+              <a:t>0)</a:t>
+            </a:r>
+          </a:p>
+          <a:p>
+            <a:r>
+              <a:rPr lang="en-US" sz="1000" dirty="0">
+                <a:solidFill>
+                  <a:srgbClr val="29363D"/>
+                </a:solidFill>
+                <a:latin typeface="Menlo-Regular" panose="020B0609030804020204" pitchFamily="49" charset="0"/>
+              </a:rPr>
+              <a:t>green </a:t>
+            </a:r>
+            <a:r>
+              <a:rPr lang="en-US" sz="1000" dirty="0">
+                <a:solidFill>
+                  <a:prstClr val="black"/>
+                </a:solidFill>
+                <a:latin typeface="Menlo-Regular" panose="020B0609030804020204" pitchFamily="49" charset="0"/>
+              </a:rPr>
+              <a:t>=</a:t>
+            </a:r>
+            <a:r>
+              <a:rPr lang="en-US" sz="1000" dirty="0">
+                <a:solidFill>
+                  <a:srgbClr val="29363D"/>
+                </a:solidFill>
+                <a:latin typeface="Menlo-Regular" panose="020B0609030804020204" pitchFamily="49" charset="0"/>
+              </a:rPr>
+              <a:t> </a:t>
+            </a:r>
+            <a:r>
+              <a:rPr lang="en-US" sz="1000" dirty="0">
+                <a:solidFill>
+                  <a:prstClr val="black"/>
+                </a:solidFill>
+                <a:latin typeface="Menlo-Regular" panose="020B0609030804020204" pitchFamily="49" charset="0"/>
+              </a:rPr>
+              <a:t>(0,</a:t>
+            </a:r>
+            <a:r>
+              <a:rPr lang="en-US" sz="1000" dirty="0">
+                <a:solidFill>
+                  <a:srgbClr val="29363D"/>
+                </a:solidFill>
+                <a:latin typeface="Menlo-Regular" panose="020B0609030804020204" pitchFamily="49" charset="0"/>
+              </a:rPr>
+              <a:t> </a:t>
+            </a:r>
+            <a:r>
+              <a:rPr lang="en-US" sz="1000" dirty="0">
+                <a:solidFill>
+                  <a:prstClr val="black"/>
+                </a:solidFill>
+                <a:latin typeface="Menlo-Regular" panose="020B0609030804020204" pitchFamily="49" charset="0"/>
+              </a:rPr>
+              <a:t>255,</a:t>
+            </a:r>
+            <a:r>
+              <a:rPr lang="en-US" sz="1000" dirty="0">
+                <a:solidFill>
+                  <a:srgbClr val="29363D"/>
+                </a:solidFill>
+                <a:latin typeface="Menlo-Regular" panose="020B0609030804020204" pitchFamily="49" charset="0"/>
+              </a:rPr>
+              <a:t> </a:t>
+            </a:r>
+            <a:r>
+              <a:rPr lang="en-US" sz="1000" dirty="0">
+                <a:solidFill>
+                  <a:prstClr val="black"/>
+                </a:solidFill>
+                <a:latin typeface="Menlo-Regular" panose="020B0609030804020204" pitchFamily="49" charset="0"/>
+              </a:rPr>
+              <a:t>0)</a:t>
+            </a:r>
+          </a:p>
+          <a:p>
+            <a:r>
+              <a:rPr lang="en-US" sz="1000" dirty="0">
+                <a:solidFill>
+                  <a:srgbClr val="29363D"/>
+                </a:solidFill>
+                <a:latin typeface="Menlo-Regular" panose="020B0609030804020204" pitchFamily="49" charset="0"/>
+              </a:rPr>
+              <a:t>blue </a:t>
+            </a:r>
+            <a:r>
+              <a:rPr lang="en-US" sz="1000" dirty="0">
+                <a:solidFill>
+                  <a:prstClr val="black"/>
+                </a:solidFill>
+                <a:latin typeface="Menlo-Regular" panose="020B0609030804020204" pitchFamily="49" charset="0"/>
+              </a:rPr>
+              <a:t>=</a:t>
+            </a:r>
+            <a:r>
+              <a:rPr lang="en-US" sz="1000" dirty="0">
+                <a:solidFill>
+                  <a:srgbClr val="29363D"/>
+                </a:solidFill>
+                <a:latin typeface="Menlo-Regular" panose="020B0609030804020204" pitchFamily="49" charset="0"/>
+              </a:rPr>
+              <a:t> </a:t>
+            </a:r>
+            <a:r>
+              <a:rPr lang="en-US" sz="1000" dirty="0">
+                <a:solidFill>
+                  <a:prstClr val="black"/>
+                </a:solidFill>
+                <a:latin typeface="Menlo-Regular" panose="020B0609030804020204" pitchFamily="49" charset="0"/>
+              </a:rPr>
+              <a:t>(0,</a:t>
+            </a:r>
+            <a:r>
+              <a:rPr lang="en-US" sz="1000" dirty="0">
+                <a:solidFill>
+                  <a:srgbClr val="29363D"/>
+                </a:solidFill>
+                <a:latin typeface="Menlo-Regular" panose="020B0609030804020204" pitchFamily="49" charset="0"/>
+              </a:rPr>
+              <a:t> </a:t>
+            </a:r>
+            <a:r>
+              <a:rPr lang="en-US" sz="1000" dirty="0">
+                <a:solidFill>
+                  <a:prstClr val="black"/>
+                </a:solidFill>
+                <a:latin typeface="Menlo-Regular" panose="020B0609030804020204" pitchFamily="49" charset="0"/>
+              </a:rPr>
+              <a:t>0,</a:t>
+            </a:r>
+            <a:r>
+              <a:rPr lang="en-US" sz="1000" dirty="0">
+                <a:solidFill>
+                  <a:srgbClr val="29363D"/>
+                </a:solidFill>
+                <a:latin typeface="Menlo-Regular" panose="020B0609030804020204" pitchFamily="49" charset="0"/>
+              </a:rPr>
+              <a:t> </a:t>
+            </a:r>
+            <a:r>
+              <a:rPr lang="en-US" sz="1000" dirty="0">
+                <a:solidFill>
+                  <a:prstClr val="black"/>
+                </a:solidFill>
+                <a:latin typeface="Menlo-Regular" panose="020B0609030804020204" pitchFamily="49" charset="0"/>
+              </a:rPr>
+              <a:t>255)</a:t>
+            </a:r>
+          </a:p>
+          <a:p>
+            <a:r>
+              <a:rPr lang="en-US" sz="1000" dirty="0">
+                <a:solidFill>
+                  <a:srgbClr val="29363D"/>
+                </a:solidFill>
+                <a:latin typeface="Menlo-Regular" panose="020B0609030804020204" pitchFamily="49" charset="0"/>
+              </a:rPr>
+              <a:t>cyan </a:t>
+            </a:r>
+            <a:r>
+              <a:rPr lang="en-US" sz="1000" dirty="0">
+                <a:solidFill>
+                  <a:prstClr val="black"/>
+                </a:solidFill>
+                <a:latin typeface="Menlo-Regular" panose="020B0609030804020204" pitchFamily="49" charset="0"/>
+              </a:rPr>
+              <a:t>=</a:t>
+            </a:r>
+            <a:r>
+              <a:rPr lang="en-US" sz="1000" dirty="0">
+                <a:solidFill>
+                  <a:srgbClr val="29363D"/>
+                </a:solidFill>
+                <a:latin typeface="Menlo-Regular" panose="020B0609030804020204" pitchFamily="49" charset="0"/>
+              </a:rPr>
+              <a:t> </a:t>
+            </a:r>
+            <a:r>
+              <a:rPr lang="en-US" sz="1000" dirty="0">
+                <a:solidFill>
+                  <a:prstClr val="black"/>
+                </a:solidFill>
+                <a:latin typeface="Menlo-Regular" panose="020B0609030804020204" pitchFamily="49" charset="0"/>
+              </a:rPr>
+              <a:t>(0,</a:t>
+            </a:r>
+            <a:r>
+              <a:rPr lang="en-US" sz="1000" dirty="0">
+                <a:solidFill>
+                  <a:srgbClr val="29363D"/>
+                </a:solidFill>
+                <a:latin typeface="Menlo-Regular" panose="020B0609030804020204" pitchFamily="49" charset="0"/>
+              </a:rPr>
+              <a:t> </a:t>
+            </a:r>
+            <a:r>
+              <a:rPr lang="en-US" sz="1000" dirty="0">
+                <a:solidFill>
+                  <a:prstClr val="black"/>
+                </a:solidFill>
+                <a:latin typeface="Menlo-Regular" panose="020B0609030804020204" pitchFamily="49" charset="0"/>
+              </a:rPr>
+              <a:t>255,</a:t>
+            </a:r>
+            <a:r>
+              <a:rPr lang="en-US" sz="1000" dirty="0">
+                <a:solidFill>
+                  <a:srgbClr val="29363D"/>
+                </a:solidFill>
+                <a:latin typeface="Menlo-Regular" panose="020B0609030804020204" pitchFamily="49" charset="0"/>
+              </a:rPr>
+              <a:t> </a:t>
+            </a:r>
+            <a:r>
+              <a:rPr lang="en-US" sz="1000" dirty="0">
+                <a:solidFill>
+                  <a:prstClr val="black"/>
+                </a:solidFill>
+                <a:latin typeface="Menlo-Regular" panose="020B0609030804020204" pitchFamily="49" charset="0"/>
+              </a:rPr>
+              <a:t>255)</a:t>
+            </a:r>
+          </a:p>
+          <a:p>
+            <a:r>
+              <a:rPr lang="en-US" sz="1000" dirty="0">
+                <a:solidFill>
+                  <a:srgbClr val="29363D"/>
+                </a:solidFill>
+                <a:latin typeface="Menlo-Regular" panose="020B0609030804020204" pitchFamily="49" charset="0"/>
+              </a:rPr>
+              <a:t>indigo </a:t>
+            </a:r>
+            <a:r>
+              <a:rPr lang="en-US" sz="1000" dirty="0">
+                <a:solidFill>
+                  <a:prstClr val="black"/>
+                </a:solidFill>
+                <a:latin typeface="Menlo-Regular" panose="020B0609030804020204" pitchFamily="49" charset="0"/>
+              </a:rPr>
+              <a:t>=</a:t>
+            </a:r>
+            <a:r>
+              <a:rPr lang="en-US" sz="1000" dirty="0">
+                <a:solidFill>
+                  <a:srgbClr val="29363D"/>
+                </a:solidFill>
+                <a:latin typeface="Menlo-Regular" panose="020B0609030804020204" pitchFamily="49" charset="0"/>
+              </a:rPr>
+              <a:t> </a:t>
+            </a:r>
+            <a:r>
+              <a:rPr lang="en-US" sz="1000" dirty="0">
+                <a:solidFill>
+                  <a:prstClr val="black"/>
+                </a:solidFill>
+                <a:latin typeface="Menlo-Regular" panose="020B0609030804020204" pitchFamily="49" charset="0"/>
+              </a:rPr>
+              <a:t>(75,</a:t>
+            </a:r>
+            <a:r>
+              <a:rPr lang="en-US" sz="1000" dirty="0">
+                <a:solidFill>
+                  <a:srgbClr val="29363D"/>
+                </a:solidFill>
+                <a:latin typeface="Menlo-Regular" panose="020B0609030804020204" pitchFamily="49" charset="0"/>
+              </a:rPr>
+              <a:t> </a:t>
+            </a:r>
+            <a:r>
+              <a:rPr lang="en-US" sz="1000" dirty="0">
+                <a:solidFill>
+                  <a:prstClr val="black"/>
+                </a:solidFill>
+                <a:latin typeface="Menlo-Regular" panose="020B0609030804020204" pitchFamily="49" charset="0"/>
+              </a:rPr>
+              <a:t>0,</a:t>
+            </a:r>
+            <a:r>
+              <a:rPr lang="en-US" sz="1000" dirty="0">
+                <a:solidFill>
+                  <a:srgbClr val="29363D"/>
+                </a:solidFill>
+                <a:latin typeface="Menlo-Regular" panose="020B0609030804020204" pitchFamily="49" charset="0"/>
+              </a:rPr>
+              <a:t> </a:t>
+            </a:r>
+            <a:r>
+              <a:rPr lang="en-US" sz="1000" dirty="0">
+                <a:solidFill>
+                  <a:prstClr val="black"/>
+                </a:solidFill>
+                <a:latin typeface="Menlo-Regular" panose="020B0609030804020204" pitchFamily="49" charset="0"/>
+              </a:rPr>
+              <a:t>130)</a:t>
+            </a:r>
+          </a:p>
+          <a:p>
+            <a:r>
+              <a:rPr lang="en-US" sz="1000" dirty="0">
+                <a:solidFill>
+                  <a:srgbClr val="29363D"/>
+                </a:solidFill>
+                <a:latin typeface="Menlo-Regular" panose="020B0609030804020204" pitchFamily="49" charset="0"/>
+              </a:rPr>
+              <a:t>violet </a:t>
+            </a:r>
+            <a:r>
+              <a:rPr lang="en-US" sz="1000" dirty="0">
+                <a:solidFill>
+                  <a:prstClr val="black"/>
+                </a:solidFill>
+                <a:latin typeface="Menlo-Regular" panose="020B0609030804020204" pitchFamily="49" charset="0"/>
+              </a:rPr>
+              <a:t>=</a:t>
+            </a:r>
+            <a:r>
+              <a:rPr lang="en-US" sz="1000" dirty="0">
+                <a:solidFill>
+                  <a:srgbClr val="29363D"/>
+                </a:solidFill>
+                <a:latin typeface="Menlo-Regular" panose="020B0609030804020204" pitchFamily="49" charset="0"/>
+              </a:rPr>
+              <a:t> </a:t>
+            </a:r>
+            <a:r>
+              <a:rPr lang="en-US" sz="1000" dirty="0">
+                <a:solidFill>
+                  <a:prstClr val="black"/>
+                </a:solidFill>
+                <a:latin typeface="Menlo-Regular" panose="020B0609030804020204" pitchFamily="49" charset="0"/>
+              </a:rPr>
+              <a:t>(138,</a:t>
+            </a:r>
+            <a:r>
+              <a:rPr lang="en-US" sz="1000" dirty="0">
+                <a:solidFill>
+                  <a:srgbClr val="29363D"/>
+                </a:solidFill>
+                <a:latin typeface="Menlo-Regular" panose="020B0609030804020204" pitchFamily="49" charset="0"/>
+              </a:rPr>
+              <a:t> </a:t>
+            </a:r>
+            <a:r>
+              <a:rPr lang="en-US" sz="1000" dirty="0">
+                <a:solidFill>
+                  <a:prstClr val="black"/>
+                </a:solidFill>
+                <a:latin typeface="Menlo-Regular" panose="020B0609030804020204" pitchFamily="49" charset="0"/>
+              </a:rPr>
+              <a:t>43,</a:t>
+            </a:r>
+            <a:r>
+              <a:rPr lang="en-US" sz="1000" dirty="0">
+                <a:solidFill>
+                  <a:srgbClr val="29363D"/>
+                </a:solidFill>
+                <a:latin typeface="Menlo-Regular" panose="020B0609030804020204" pitchFamily="49" charset="0"/>
+              </a:rPr>
+              <a:t> </a:t>
+            </a:r>
+            <a:r>
+              <a:rPr lang="en-US" sz="1000" dirty="0">
+                <a:solidFill>
+                  <a:prstClr val="black"/>
+                </a:solidFill>
+                <a:latin typeface="Menlo-Regular" panose="020B0609030804020204" pitchFamily="49" charset="0"/>
+              </a:rPr>
+              <a:t>226)</a:t>
+            </a:r>
+          </a:p>
+          <a:p>
+            <a:r>
+              <a:rPr lang="en-US" sz="1000" dirty="0">
+                <a:solidFill>
+                  <a:prstClr val="black"/>
+                </a:solidFill>
+                <a:latin typeface="Menlo-Regular" panose="020B0609030804020204" pitchFamily="49" charset="0"/>
+              </a:rPr>
+              <a:t>purple = (255,0,255)</a:t>
+            </a:r>
+          </a:p>
+          <a:p>
+            <a:r>
+              <a:rPr lang="en-US" sz="1000" dirty="0">
+                <a:solidFill>
+                  <a:srgbClr val="29363D"/>
+                </a:solidFill>
+                <a:latin typeface="Menlo-Regular" panose="020B0609030804020204" pitchFamily="49" charset="0"/>
+              </a:rPr>
+              <a:t>white </a:t>
+            </a:r>
+            <a:r>
+              <a:rPr lang="en-US" sz="1000" dirty="0">
+                <a:solidFill>
+                  <a:prstClr val="black"/>
+                </a:solidFill>
+                <a:latin typeface="Menlo-Regular" panose="020B0609030804020204" pitchFamily="49" charset="0"/>
+              </a:rPr>
+              <a:t>=</a:t>
+            </a:r>
+            <a:r>
+              <a:rPr lang="en-US" sz="1000" dirty="0">
+                <a:solidFill>
+                  <a:srgbClr val="29363D"/>
+                </a:solidFill>
+                <a:latin typeface="Menlo-Regular" panose="020B0609030804020204" pitchFamily="49" charset="0"/>
+              </a:rPr>
+              <a:t> </a:t>
+            </a:r>
+            <a:r>
+              <a:rPr lang="en-US" sz="1000" dirty="0">
+                <a:solidFill>
+                  <a:prstClr val="black"/>
+                </a:solidFill>
+                <a:latin typeface="Menlo-Regular" panose="020B0609030804020204" pitchFamily="49" charset="0"/>
+              </a:rPr>
+              <a:t>(128,</a:t>
+            </a:r>
+            <a:r>
+              <a:rPr lang="en-US" sz="1000" dirty="0">
+                <a:solidFill>
+                  <a:srgbClr val="29363D"/>
+                </a:solidFill>
+                <a:latin typeface="Menlo-Regular" panose="020B0609030804020204" pitchFamily="49" charset="0"/>
+              </a:rPr>
+              <a:t> </a:t>
+            </a:r>
+            <a:r>
+              <a:rPr lang="en-US" sz="1000" dirty="0">
+                <a:solidFill>
+                  <a:prstClr val="black"/>
+                </a:solidFill>
+                <a:latin typeface="Menlo-Regular" panose="020B0609030804020204" pitchFamily="49" charset="0"/>
+              </a:rPr>
+              <a:t>128,</a:t>
+            </a:r>
+            <a:r>
+              <a:rPr lang="en-US" sz="1000" dirty="0">
+                <a:solidFill>
+                  <a:srgbClr val="29363D"/>
+                </a:solidFill>
+                <a:latin typeface="Menlo-Regular" panose="020B0609030804020204" pitchFamily="49" charset="0"/>
+              </a:rPr>
+              <a:t> </a:t>
+            </a:r>
+            <a:r>
+              <a:rPr lang="en-US" sz="1000" dirty="0">
+                <a:solidFill>
+                  <a:prstClr val="black"/>
+                </a:solidFill>
+                <a:latin typeface="Menlo-Regular" panose="020B0609030804020204" pitchFamily="49" charset="0"/>
+              </a:rPr>
+              <a:t>128)</a:t>
+            </a:r>
+          </a:p>
+          <a:p>
+            <a:r>
+              <a:rPr lang="en-US" sz="1000" dirty="0">
+                <a:solidFill>
+                  <a:prstClr val="black"/>
+                </a:solidFill>
+                <a:latin typeface="Menlo-Regular" panose="020B0609030804020204" pitchFamily="49" charset="0"/>
+              </a:rPr>
+              <a:t>off = (0,0,0)</a:t>
+            </a:r>
+            <a:endParaRPr lang="en-US" sz="1000" dirty="0"/>
+          </a:p>
+        </p:txBody>
+      </p:sp>
+      <p:sp>
+        <p:nvSpPr>
+          <p:cNvPr id="9" name="Rounded Rectangle 8">
+            <a:extLst>
+              <a:ext uri="{FF2B5EF4-FFF2-40B4-BE49-F238E27FC236}">
+                <a16:creationId xmlns:a16="http://schemas.microsoft.com/office/drawing/2014/main" id="{313E30AF-E934-F151-56BE-EE24C808C84D}"/>
+              </a:ext>
+            </a:extLst>
+          </p:cNvPr>
+          <p:cNvSpPr/>
+          <p:nvPr/>
+        </p:nvSpPr>
+        <p:spPr>
+          <a:xfrm>
+            <a:off x="4904155" y="1909323"/>
+            <a:ext cx="1295400" cy="183093"/>
+          </a:xfrm>
+          <a:prstGeom prst="roundRect">
+            <a:avLst/>
+          </a:prstGeom>
+          <a:ln w="19050">
+            <a:solidFill>
+              <a:schemeClr val="tx1"/>
+            </a:solidFill>
+          </a:ln>
+        </p:spPr>
+        <p:style>
+          <a:lnRef idx="2">
+            <a:schemeClr val="accent1">
+              <a:shade val="50000"/>
+            </a:schemeClr>
+          </a:lnRef>
+          <a:fillRef idx="1">
+            <a:schemeClr val="accent1"/>
+          </a:fillRef>
+          <a:effectRef idx="0">
+            <a:schemeClr val="accent1"/>
+          </a:effectRef>
+          <a:fontRef idx="minor">
+            <a:schemeClr val="lt1"/>
+          </a:fontRef>
+        </p:style>
+        <p:txBody>
+          <a:bodyPr rtlCol="0" anchor="ctr"/>
+          <a:lstStyle/>
+          <a:p>
+            <a:r>
+              <a:rPr lang="en-US" sz="1600" dirty="0"/>
+              <a:t>Color Codes</a:t>
+            </a:r>
+          </a:p>
+        </p:txBody>
+      </p:sp>
     </p:spTree>
     <p:extLst>
       <p:ext uri="{BB962C8B-B14F-4D97-AF65-F5344CB8AC3E}">
